--- a/Executive Summary.pptx
+++ b/Executive Summary.pptx
@@ -6,18 +6,17 @@
     <p:sldMasterId id="2147483661" r:id="rId2"/>
   </p:sldMasterIdLst>
   <p:notesMasterIdLst>
-    <p:notesMasterId r:id="rId12"/>
+    <p:notesMasterId r:id="rId11"/>
   </p:notesMasterIdLst>
   <p:sldIdLst>
     <p:sldId id="256" r:id="rId3"/>
     <p:sldId id="257" r:id="rId4"/>
-    <p:sldId id="258" r:id="rId5"/>
-    <p:sldId id="259" r:id="rId6"/>
-    <p:sldId id="262" r:id="rId7"/>
-    <p:sldId id="263" r:id="rId8"/>
-    <p:sldId id="261" r:id="rId9"/>
-    <p:sldId id="264" r:id="rId10"/>
-    <p:sldId id="265" r:id="rId11"/>
+    <p:sldId id="259" r:id="rId5"/>
+    <p:sldId id="262" r:id="rId6"/>
+    <p:sldId id="263" r:id="rId7"/>
+    <p:sldId id="261" r:id="rId8"/>
+    <p:sldId id="264" r:id="rId9"/>
+    <p:sldId id="265" r:id="rId10"/>
   </p:sldIdLst>
   <p:sldSz cx="12192000" cy="6858000"/>
   <p:notesSz cx="6858000" cy="9144000"/>
@@ -116,6 +115,11 @@
       </a:defRPr>
     </a:lvl9pPr>
   </p:defaultTextStyle>
+  <p:extLst>
+    <p:ext uri="{EFAFB233-063F-42B5-8137-9DF3F51BA10A}">
+      <p15:sldGuideLst xmlns:p15="http://schemas.microsoft.com/office/powerpoint/2012/main"/>
+    </p:ext>
+  </p:extLst>
 </p:presentation>
 </file>
 
@@ -201,7 +205,7 @@
           <a:p>
             <a:fld id="{1082008C-C116-4BEC-AA9D-C6756B9EE77D}" type="datetimeFigureOut">
               <a:rPr lang="en-US" smtClean="0"/>
-              <a:t>11/27/2024</a:t>
+              <a:t>1/13/2025</a:t>
             </a:fld>
             <a:endParaRPr lang="en-US"/>
           </a:p>
@@ -533,7 +537,7 @@
           <a:p>
             <a:fld id="{F7021451-1387-4CA6-816F-3879F97B5CBC}" type="slidenum">
               <a:rPr lang="en-US"/>
-              <a:t>5</a:t>
+              <a:t>4</a:t>
             </a:fld>
             <a:endParaRPr lang="en-US"/>
           </a:p>
@@ -699,7 +703,7 @@
           <a:p>
             <a:fld id="{5D7E2BD9-C391-42AE-8163-5D509184F8E1}" type="datetimeFigureOut">
               <a:rPr lang="en-US" smtClean="0"/>
-              <a:t>11/27/2024</a:t>
+              <a:t>1/13/2025</a:t>
             </a:fld>
             <a:endParaRPr lang="en-US"/>
           </a:p>
@@ -897,7 +901,7 @@
           <a:p>
             <a:fld id="{5D7E2BD9-C391-42AE-8163-5D509184F8E1}" type="datetimeFigureOut">
               <a:rPr lang="en-US" smtClean="0"/>
-              <a:t>11/27/2024</a:t>
+              <a:t>1/13/2025</a:t>
             </a:fld>
             <a:endParaRPr lang="en-US"/>
           </a:p>
@@ -1105,7 +1109,7 @@
           <a:p>
             <a:fld id="{5D7E2BD9-C391-42AE-8163-5D509184F8E1}" type="datetimeFigureOut">
               <a:rPr lang="en-US" smtClean="0"/>
-              <a:t>11/27/2024</a:t>
+              <a:t>1/13/2025</a:t>
             </a:fld>
             <a:endParaRPr lang="en-US"/>
           </a:p>
@@ -1329,7 +1333,7 @@
           <a:p>
             <a:fld id="{AA8A0EC6-5648-844A-8827-911B00959032}" type="datetimeFigureOut">
               <a:rPr lang="en-US" smtClean="0"/>
-              <a:t>11/27/2024</a:t>
+              <a:t>1/13/2025</a:t>
             </a:fld>
             <a:endParaRPr lang="en-US"/>
           </a:p>
@@ -1975,7 +1979,7 @@
           <a:p>
             <a:fld id="{AA8A0EC6-5648-844A-8827-911B00959032}" type="datetimeFigureOut">
               <a:rPr lang="en-US" smtClean="0"/>
-              <a:t>11/27/2024</a:t>
+              <a:t>1/13/2025</a:t>
             </a:fld>
             <a:endParaRPr lang="en-US"/>
           </a:p>
@@ -2170,7 +2174,7 @@
           <a:p>
             <a:fld id="{AA8A0EC6-5648-844A-8827-911B00959032}" type="datetimeFigureOut">
               <a:rPr lang="en-US" smtClean="0"/>
-              <a:t>11/27/2024</a:t>
+              <a:t>1/13/2025</a:t>
             </a:fld>
             <a:endParaRPr lang="en-US"/>
           </a:p>
@@ -2774,7 +2778,7 @@
           <a:p>
             <a:fld id="{AA8A0EC6-5648-844A-8827-911B00959032}" type="datetimeFigureOut">
               <a:rPr lang="en-US" smtClean="0"/>
-              <a:t>11/27/2024</a:t>
+              <a:t>1/13/2025</a:t>
             </a:fld>
             <a:endParaRPr lang="en-US"/>
           </a:p>
@@ -3236,7 +3240,7 @@
           <a:p>
             <a:fld id="{AA8A0EC6-5648-844A-8827-911B00959032}" type="datetimeFigureOut">
               <a:rPr lang="en-US" smtClean="0"/>
-              <a:t>11/27/2024</a:t>
+              <a:t>1/13/2025</a:t>
             </a:fld>
             <a:endParaRPr lang="en-US"/>
           </a:p>
@@ -3550,7 +3554,7 @@
           <a:p>
             <a:fld id="{AA8A0EC6-5648-844A-8827-911B00959032}" type="datetimeFigureOut">
               <a:rPr lang="en-US" smtClean="0"/>
-              <a:t>11/27/2024</a:t>
+              <a:t>1/13/2025</a:t>
             </a:fld>
             <a:endParaRPr lang="en-US"/>
           </a:p>
@@ -4226,7 +4230,7 @@
           <a:p>
             <a:fld id="{AA8A0EC6-5648-844A-8827-911B00959032}" type="datetimeFigureOut">
               <a:rPr lang="en-US" smtClean="0"/>
-              <a:t>11/27/2024</a:t>
+              <a:t>1/13/2025</a:t>
             </a:fld>
             <a:endParaRPr lang="en-US"/>
           </a:p>
@@ -4830,7 +4834,7 @@
           <a:p>
             <a:fld id="{AA8A0EC6-5648-844A-8827-911B00959032}" type="datetimeFigureOut">
               <a:rPr lang="en-US" smtClean="0"/>
-              <a:t>11/27/2024</a:t>
+              <a:t>1/13/2025</a:t>
             </a:fld>
             <a:endParaRPr lang="en-US"/>
           </a:p>
@@ -5481,7 +5485,7 @@
           <a:p>
             <a:fld id="{5D7E2BD9-C391-42AE-8163-5D509184F8E1}" type="datetimeFigureOut">
               <a:rPr lang="en-US" smtClean="0"/>
-              <a:t>11/27/2024</a:t>
+              <a:t>1/13/2025</a:t>
             </a:fld>
             <a:endParaRPr lang="en-US"/>
           </a:p>
@@ -5630,7 +5634,7 @@
           <a:p>
             <a:fld id="{AA8A0EC6-5648-844A-8827-911B00959032}" type="datetimeFigureOut">
               <a:rPr lang="en-US" smtClean="0"/>
-              <a:t>11/27/2024</a:t>
+              <a:t>1/13/2025</a:t>
             </a:fld>
             <a:endParaRPr lang="en-US"/>
           </a:p>
@@ -5722,7 +5726,7 @@
           <a:p>
             <a:fld id="{AA8A0EC6-5648-844A-8827-911B00959032}" type="datetimeFigureOut">
               <a:rPr lang="en-US" smtClean="0"/>
-              <a:t>11/27/2024</a:t>
+              <a:t>1/13/2025</a:t>
             </a:fld>
             <a:endParaRPr lang="en-US"/>
           </a:p>
@@ -5925,7 +5929,7 @@
           <a:p>
             <a:fld id="{AA8A0EC6-5648-844A-8827-911B00959032}" type="datetimeFigureOut">
               <a:rPr lang="en-US" smtClean="0"/>
-              <a:t>11/27/2024</a:t>
+              <a:t>1/13/2025</a:t>
             </a:fld>
             <a:endParaRPr lang="en-US"/>
           </a:p>
@@ -6247,7 +6251,7 @@
           <a:p>
             <a:fld id="{5D7E2BD9-C391-42AE-8163-5D509184F8E1}" type="datetimeFigureOut">
               <a:rPr lang="en-US" smtClean="0"/>
-              <a:t>11/27/2024</a:t>
+              <a:t>1/13/2025</a:t>
             </a:fld>
             <a:endParaRPr lang="en-US"/>
           </a:p>
@@ -6512,7 +6516,7 @@
           <a:p>
             <a:fld id="{5D7E2BD9-C391-42AE-8163-5D509184F8E1}" type="datetimeFigureOut">
               <a:rPr lang="en-US" smtClean="0"/>
-              <a:t>11/27/2024</a:t>
+              <a:t>1/13/2025</a:t>
             </a:fld>
             <a:endParaRPr lang="en-US"/>
           </a:p>
@@ -6924,7 +6928,7 @@
           <a:p>
             <a:fld id="{5D7E2BD9-C391-42AE-8163-5D509184F8E1}" type="datetimeFigureOut">
               <a:rPr lang="en-US" smtClean="0"/>
-              <a:t>11/27/2024</a:t>
+              <a:t>1/13/2025</a:t>
             </a:fld>
             <a:endParaRPr lang="en-US"/>
           </a:p>
@@ -7065,7 +7069,7 @@
           <a:p>
             <a:fld id="{5D7E2BD9-C391-42AE-8163-5D509184F8E1}" type="datetimeFigureOut">
               <a:rPr lang="en-US" smtClean="0"/>
-              <a:t>11/27/2024</a:t>
+              <a:t>1/13/2025</a:t>
             </a:fld>
             <a:endParaRPr lang="en-US"/>
           </a:p>
@@ -7178,7 +7182,7 @@
           <a:p>
             <a:fld id="{5D7E2BD9-C391-42AE-8163-5D509184F8E1}" type="datetimeFigureOut">
               <a:rPr lang="en-US" smtClean="0"/>
-              <a:t>11/27/2024</a:t>
+              <a:t>1/13/2025</a:t>
             </a:fld>
             <a:endParaRPr lang="en-US"/>
           </a:p>
@@ -7489,7 +7493,7 @@
           <a:p>
             <a:fld id="{5D7E2BD9-C391-42AE-8163-5D509184F8E1}" type="datetimeFigureOut">
               <a:rPr lang="en-US" smtClean="0"/>
-              <a:t>11/27/2024</a:t>
+              <a:t>1/13/2025</a:t>
             </a:fld>
             <a:endParaRPr lang="en-US"/>
           </a:p>
@@ -7777,7 +7781,7 @@
           <a:p>
             <a:fld id="{5D7E2BD9-C391-42AE-8163-5D509184F8E1}" type="datetimeFigureOut">
               <a:rPr lang="en-US" smtClean="0"/>
-              <a:t>11/27/2024</a:t>
+              <a:t>1/13/2025</a:t>
             </a:fld>
             <a:endParaRPr lang="en-US"/>
           </a:p>
@@ -8018,7 +8022,7 @@
           <a:p>
             <a:fld id="{5D7E2BD9-C391-42AE-8163-5D509184F8E1}" type="datetimeFigureOut">
               <a:rPr lang="en-US" smtClean="0"/>
-              <a:t>11/27/2024</a:t>
+              <a:t>1/13/2025</a:t>
             </a:fld>
             <a:endParaRPr lang="en-US"/>
           </a:p>
@@ -8553,7 +8557,7 @@
           <a:p>
             <a:fld id="{AA8A0EC6-5648-844A-8827-911B00959032}" type="datetimeFigureOut">
               <a:rPr lang="en-US" smtClean="0"/>
-              <a:t>11/27/2024</a:t>
+              <a:t>1/13/2025</a:t>
             </a:fld>
             <a:endParaRPr lang="en-US"/>
           </a:p>
@@ -9039,7 +9043,15 @@
           <a:p>
             <a:r>
               <a:rPr lang="en-US" dirty="0"/>
-              <a:t>Employee Retention Analysis</a:t>
+              <a:t>Employee </a:t>
+            </a:r>
+            <a:r>
+              <a:rPr lang="en-US" altLang="zh-CN" dirty="0"/>
+              <a:t>Turnover </a:t>
+            </a:r>
+            <a:r>
+              <a:rPr lang="en-US" dirty="0"/>
+              <a:t>Analysis</a:t>
             </a:r>
           </a:p>
         </p:txBody>
@@ -9066,8 +9078,8 @@
           <a:lstStyle/>
           <a:p>
             <a:r>
-              <a:rPr lang="en-US"/>
-              <a:t>By Your Name</a:t>
+              <a:rPr lang="en-US" dirty="0"/>
+              <a:t>By Yuan Chen</a:t>
             </a:r>
           </a:p>
         </p:txBody>
@@ -9411,150 +9423,6 @@
           <p:cNvPr id="2" name="Title 1">
             <a:extLst>
               <a:ext uri="{FF2B5EF4-FFF2-40B4-BE49-F238E27FC236}">
-                <a16:creationId xmlns:a16="http://schemas.microsoft.com/office/drawing/2014/main" id="{7FFC639D-6724-25E5-B337-78EE6004546B}"/>
-              </a:ext>
-            </a:extLst>
-          </p:cNvPr>
-          <p:cNvSpPr>
-            <a:spLocks noGrp="1"/>
-          </p:cNvSpPr>
-          <p:nvPr>
-            <p:ph type="title"/>
-          </p:nvPr>
-        </p:nvSpPr>
-        <p:spPr/>
-        <p:txBody>
-          <a:bodyPr/>
-          <a:lstStyle/>
-          <a:p>
-            <a:r>
-              <a:rPr lang="en-US"/>
-              <a:t>Data Collection Methods</a:t>
-            </a:r>
-          </a:p>
-        </p:txBody>
-      </p:sp>
-      <p:sp>
-        <p:nvSpPr>
-          <p:cNvPr id="7" name="Text Placeholder 6">
-            <a:extLst>
-              <a:ext uri="{FF2B5EF4-FFF2-40B4-BE49-F238E27FC236}">
-                <a16:creationId xmlns:a16="http://schemas.microsoft.com/office/drawing/2014/main" id="{ADB7C682-51E8-106F-23EF-6A7B66ADFC6E}"/>
-              </a:ext>
-            </a:extLst>
-          </p:cNvPr>
-          <p:cNvSpPr>
-            <a:spLocks noGrp="1"/>
-          </p:cNvSpPr>
-          <p:nvPr>
-            <p:ph type="body" idx="24"/>
-          </p:nvPr>
-        </p:nvSpPr>
-        <p:spPr/>
-        <p:txBody>
-          <a:bodyPr/>
-          <a:lstStyle/>
-          <a:p>
-            <a:r>
-              <a:rPr lang="en-US"/>
-              <a:t>Performance Metrics Review</a:t>
-            </a:r>
-          </a:p>
-        </p:txBody>
-      </p:sp>
-      <p:sp>
-        <p:nvSpPr>
-          <p:cNvPr id="8" name="Text Placeholder 7">
-            <a:extLst>
-              <a:ext uri="{FF2B5EF4-FFF2-40B4-BE49-F238E27FC236}">
-                <a16:creationId xmlns:a16="http://schemas.microsoft.com/office/drawing/2014/main" id="{FA79D0C8-021F-EEB1-EEFB-A77C55A166E8}"/>
-              </a:ext>
-            </a:extLst>
-          </p:cNvPr>
-          <p:cNvSpPr>
-            <a:spLocks noGrp="1"/>
-          </p:cNvSpPr>
-          <p:nvPr>
-            <p:ph type="body" sz="half" idx="25"/>
-          </p:nvPr>
-        </p:nvSpPr>
-        <p:spPr>
-          <a:xfrm>
-            <a:off x="812463" y="2812809"/>
-            <a:ext cx="4693188" cy="830639"/>
-          </a:xfrm>
-        </p:spPr>
-        <p:txBody>
-          <a:bodyPr/>
-          <a:lstStyle/>
-          <a:p>
-            <a:r>
-              <a:rPr lang="en-US" sz="1400" dirty="0"/>
-              <a:t>Analyze existing performance data from Human Resource Department to spot trends related to turnover.</a:t>
-            </a:r>
-          </a:p>
-        </p:txBody>
-      </p:sp>
-      <p:pic>
-        <p:nvPicPr>
-          <p:cNvPr id="10" name="Picture Placeholder 9">
-            <a:extLst>
-              <a:ext uri="{FF2B5EF4-FFF2-40B4-BE49-F238E27FC236}">
-                <a16:creationId xmlns:a16="http://schemas.microsoft.com/office/drawing/2014/main" id="{86BAA464-735F-71CE-ED9D-9052F018B458}"/>
-              </a:ext>
-            </a:extLst>
-          </p:cNvPr>
-          <p:cNvPicPr>
-            <a:picLocks noGrp="1" noChangeAspect="1"/>
-          </p:cNvPicPr>
-          <p:nvPr>
-            <p:ph type="pic" sz="quarter" idx="26"/>
-          </p:nvPr>
-        </p:nvPicPr>
-        <p:blipFill>
-          <a:blip r:embed="rId2"/>
-          <a:srcRect l="3941" r="3941"/>
-          <a:stretch>
-            <a:fillRect/>
-          </a:stretch>
-        </p:blipFill>
-        <p:spPr/>
-      </p:pic>
-    </p:spTree>
-    <p:extLst>
-      <p:ext uri="{BB962C8B-B14F-4D97-AF65-F5344CB8AC3E}">
-        <p14:creationId xmlns:p14="http://schemas.microsoft.com/office/powerpoint/2010/main" val="406900388"/>
-      </p:ext>
-    </p:extLst>
-  </p:cSld>
-  <p:clrMapOvr>
-    <a:masterClrMapping/>
-  </p:clrMapOvr>
-</p:sld>
-</file>
-
-<file path=ppt/slides/slide4.xml><?xml version="1.0" encoding="utf-8"?>
-<p:sld xmlns:a="http://schemas.openxmlformats.org/drawingml/2006/main" xmlns:r="http://schemas.openxmlformats.org/officeDocument/2006/relationships" xmlns:p="http://schemas.openxmlformats.org/presentationml/2006/main">
-  <p:cSld>
-    <p:spTree>
-      <p:nvGrpSpPr>
-        <p:cNvPr id="1" name=""/>
-        <p:cNvGrpSpPr/>
-        <p:nvPr/>
-      </p:nvGrpSpPr>
-      <p:grpSpPr>
-        <a:xfrm>
-          <a:off x="0" y="0"/>
-          <a:ext cx="0" cy="0"/>
-          <a:chOff x="0" y="0"/>
-          <a:chExt cx="0" cy="0"/>
-        </a:xfrm>
-      </p:grpSpPr>
-      <p:sp>
-        <p:nvSpPr>
-          <p:cNvPr id="2" name="Title 1">
-            <a:extLst>
-              <a:ext uri="{FF2B5EF4-FFF2-40B4-BE49-F238E27FC236}">
                 <a16:creationId xmlns:a16="http://schemas.microsoft.com/office/drawing/2014/main" id="{7F308778-DA32-B67D-06B0-9FC498E3441B}"/>
               </a:ext>
             </a:extLst>
@@ -9818,7 +9686,7 @@
 </p:sld>
 </file>
 
-<file path=ppt/slides/slide5.xml><?xml version="1.0" encoding="utf-8"?>
+<file path=ppt/slides/slide4.xml><?xml version="1.0" encoding="utf-8"?>
 <p:sld xmlns:a="http://schemas.openxmlformats.org/drawingml/2006/main" xmlns:r="http://schemas.openxmlformats.org/officeDocument/2006/relationships" xmlns:p="http://schemas.openxmlformats.org/presentationml/2006/main">
   <p:cSld name="Slide 1">
     <p:bg>
@@ -9852,14 +9720,14 @@
           <p:nvPr>
             <p:extLst>
               <p:ext uri="{D42A27DB-BD31-4B8C-83A1-F6EECF244321}">
-                <p14:modId xmlns:p14="http://schemas.microsoft.com/office/powerpoint/2010/main" val="1429127812"/>
+                <p14:modId xmlns:p14="http://schemas.microsoft.com/office/powerpoint/2010/main" val="311521977"/>
               </p:ext>
             </p:extLst>
           </p:nvPr>
         </p:nvGraphicFramePr>
         <p:xfrm>
           <a:off x="609600" y="2804160"/>
-          <a:ext cx="10363202" cy="2670048"/>
+          <a:ext cx="10363202" cy="2145792"/>
         </p:xfrm>
         <a:graphic>
           <a:graphicData uri="http://schemas.openxmlformats.org/drawingml/2006/table">
@@ -11217,16 +11085,6 @@
                         </a:rPr>
                         <a:t>Random Forest</a:t>
                       </a:r>
-                      <a:endParaRPr lang="en-US" sz="1400" dirty="0">
-                        <a:solidFill>
-                          <a:schemeClr val="bg2">
-                            <a:lumMod val="25000"/>
-                          </a:schemeClr>
-                        </a:solidFill>
-                        <a:latin typeface="Roboto" charset="0"/>
-                        <a:ea typeface="Roboto" charset="0"/>
-                        <a:cs typeface="Roboto" charset="0"/>
-                      </a:endParaRPr>
                     </a:p>
                   </a:txBody>
                   <a:tcPr marL="73152" marR="73152" marT="73152" marB="73152" anchor="ctr">
@@ -11648,367 +11506,6 @@
                   </a:ext>
                 </a:extLst>
               </a:tr>
-              <a:tr h="524256">
-                <a:tc>
-                  <a:txBody>
-                    <a:bodyPr/>
-                    <a:lstStyle/>
-                    <a:p>
-                      <a:pPr marL="0" indent="0">
-                        <a:buNone/>
-                      </a:pPr>
-                      <a:endParaRPr lang="en-US" sz="1400" dirty="0">
-                        <a:latin typeface="Roboto" charset="0"/>
-                        <a:ea typeface="Roboto" charset="0"/>
-                        <a:cs typeface="Roboto" charset="0"/>
-                      </a:endParaRPr>
-                    </a:p>
-                  </a:txBody>
-                  <a:tcPr marL="73152" marR="73152" marT="73152" marB="73152" anchor="ctr">
-                    <a:lnL w="0" cap="flat" cmpd="sng" algn="ctr">
-                      <a:solidFill>
-                        <a:srgbClr val="666666"/>
-                      </a:solidFill>
-                      <a:prstDash val="sysDash"/>
-                      <a:round/>
-                      <a:headEnd type="none" w="med" len="med"/>
-                      <a:tailEnd type="none" w="med" len="med"/>
-                    </a:lnL>
-                    <a:lnR w="12700" cap="flat" cmpd="sng" algn="ctr">
-                      <a:solidFill>
-                        <a:srgbClr val="A6A6A6"/>
-                      </a:solidFill>
-                      <a:prstDash val="sysDash"/>
-                      <a:round/>
-                      <a:headEnd type="none" w="med" len="med"/>
-                      <a:tailEnd type="none" w="med" len="med"/>
-                    </a:lnR>
-                    <a:lnT w="12700" cap="flat" cmpd="sng" algn="ctr">
-                      <a:solidFill>
-                        <a:srgbClr val="A6A6A6"/>
-                      </a:solidFill>
-                      <a:prstDash val="sysDash"/>
-                      <a:round/>
-                      <a:headEnd type="none" w="med" len="med"/>
-                      <a:tailEnd type="none" w="med" len="med"/>
-                    </a:lnT>
-                    <a:lnB w="0" cap="flat" cmpd="sng" algn="ctr">
-                      <a:solidFill>
-                        <a:srgbClr val="666666"/>
-                      </a:solidFill>
-                      <a:prstDash val="sysDash"/>
-                      <a:round/>
-                      <a:headEnd type="none" w="med" len="med"/>
-                      <a:tailEnd type="none" w="med" len="med"/>
-                    </a:lnB>
-                    <a:solidFill>
-                      <a:srgbClr val="BFBFBF">
-                        <a:alpha val="0"/>
-                      </a:srgbClr>
-                    </a:solidFill>
-                  </a:tcPr>
-                </a:tc>
-                <a:tc>
-                  <a:txBody>
-                    <a:bodyPr/>
-                    <a:lstStyle/>
-                    <a:p>
-                      <a:pPr marL="0" indent="0">
-                        <a:buNone/>
-                      </a:pPr>
-                      <a:endParaRPr lang="en-US" sz="1400" dirty="0">
-                        <a:latin typeface="Roboto" charset="0"/>
-                        <a:ea typeface="Roboto" charset="0"/>
-                        <a:cs typeface="Roboto" charset="0"/>
-                      </a:endParaRPr>
-                    </a:p>
-                  </a:txBody>
-                  <a:tcPr marL="73152" marR="73152" marT="73152" marB="73152" anchor="ctr">
-                    <a:lnL w="12700" cap="flat" cmpd="sng" algn="ctr">
-                      <a:solidFill>
-                        <a:srgbClr val="A6A6A6"/>
-                      </a:solidFill>
-                      <a:prstDash val="sysDash"/>
-                      <a:round/>
-                      <a:headEnd type="none" w="med" len="med"/>
-                      <a:tailEnd type="none" w="med" len="med"/>
-                    </a:lnL>
-                    <a:lnR w="12700" cap="flat" cmpd="sng" algn="ctr">
-                      <a:solidFill>
-                        <a:srgbClr val="A6A6A6"/>
-                      </a:solidFill>
-                      <a:prstDash val="sysDash"/>
-                      <a:round/>
-                      <a:headEnd type="none" w="med" len="med"/>
-                      <a:tailEnd type="none" w="med" len="med"/>
-                    </a:lnR>
-                    <a:lnT w="12700" cap="flat" cmpd="sng" algn="ctr">
-                      <a:solidFill>
-                        <a:srgbClr val="A6A6A6"/>
-                      </a:solidFill>
-                      <a:prstDash val="sysDash"/>
-                      <a:round/>
-                      <a:headEnd type="none" w="med" len="med"/>
-                      <a:tailEnd type="none" w="med" len="med"/>
-                    </a:lnT>
-                    <a:lnB w="0" cap="flat" cmpd="sng" algn="ctr">
-                      <a:solidFill>
-                        <a:srgbClr val="666666"/>
-                      </a:solidFill>
-                      <a:prstDash val="sysDash"/>
-                      <a:round/>
-                      <a:headEnd type="none" w="med" len="med"/>
-                      <a:tailEnd type="none" w="med" len="med"/>
-                    </a:lnB>
-                    <a:solidFill>
-                      <a:srgbClr val="BFBFBF">
-                        <a:alpha val="0"/>
-                      </a:srgbClr>
-                    </a:solidFill>
-                  </a:tcPr>
-                </a:tc>
-                <a:tc>
-                  <a:txBody>
-                    <a:bodyPr/>
-                    <a:lstStyle/>
-                    <a:p>
-                      <a:pPr marL="0" indent="0">
-                        <a:buNone/>
-                      </a:pPr>
-                      <a:endParaRPr lang="en-US" sz="1400" dirty="0">
-                        <a:latin typeface="Roboto" charset="0"/>
-                        <a:ea typeface="Roboto" charset="0"/>
-                        <a:cs typeface="Roboto" charset="0"/>
-                      </a:endParaRPr>
-                    </a:p>
-                  </a:txBody>
-                  <a:tcPr marL="73152" marR="73152" marT="73152" marB="73152" anchor="ctr">
-                    <a:lnL w="12700" cap="flat" cmpd="sng" algn="ctr">
-                      <a:solidFill>
-                        <a:srgbClr val="A6A6A6"/>
-                      </a:solidFill>
-                      <a:prstDash val="sysDash"/>
-                      <a:round/>
-                      <a:headEnd type="none" w="med" len="med"/>
-                      <a:tailEnd type="none" w="med" len="med"/>
-                    </a:lnL>
-                    <a:lnR w="12700" cap="flat" cmpd="sng" algn="ctr">
-                      <a:solidFill>
-                        <a:srgbClr val="A6A6A6"/>
-                      </a:solidFill>
-                      <a:prstDash val="sysDash"/>
-                      <a:round/>
-                      <a:headEnd type="none" w="med" len="med"/>
-                      <a:tailEnd type="none" w="med" len="med"/>
-                    </a:lnR>
-                    <a:lnT w="12700" cap="flat" cmpd="sng" algn="ctr">
-                      <a:solidFill>
-                        <a:srgbClr val="A6A6A6"/>
-                      </a:solidFill>
-                      <a:prstDash val="sysDash"/>
-                      <a:round/>
-                      <a:headEnd type="none" w="med" len="med"/>
-                      <a:tailEnd type="none" w="med" len="med"/>
-                    </a:lnT>
-                    <a:lnB w="0" cap="flat" cmpd="sng" algn="ctr">
-                      <a:solidFill>
-                        <a:srgbClr val="666666"/>
-                      </a:solidFill>
-                      <a:prstDash val="sysDash"/>
-                      <a:round/>
-                      <a:headEnd type="none" w="med" len="med"/>
-                      <a:tailEnd type="none" w="med" len="med"/>
-                    </a:lnB>
-                    <a:solidFill>
-                      <a:srgbClr val="BFBFBF">
-                        <a:alpha val="0"/>
-                      </a:srgbClr>
-                    </a:solidFill>
-                  </a:tcPr>
-                </a:tc>
-                <a:tc>
-                  <a:txBody>
-                    <a:bodyPr/>
-                    <a:lstStyle/>
-                    <a:p>
-                      <a:pPr marL="0" indent="0">
-                        <a:buNone/>
-                      </a:pPr>
-                      <a:endParaRPr lang="en-US" sz="1400" dirty="0">
-                        <a:latin typeface="Roboto" charset="0"/>
-                        <a:ea typeface="Roboto" charset="0"/>
-                        <a:cs typeface="Roboto" charset="0"/>
-                      </a:endParaRPr>
-                    </a:p>
-                  </a:txBody>
-                  <a:tcPr marL="73152" marR="73152" marT="73152" marB="73152" anchor="ctr">
-                    <a:lnL w="12700" cap="flat" cmpd="sng" algn="ctr">
-                      <a:solidFill>
-                        <a:srgbClr val="A6A6A6"/>
-                      </a:solidFill>
-                      <a:prstDash val="sysDash"/>
-                      <a:round/>
-                      <a:headEnd type="none" w="med" len="med"/>
-                      <a:tailEnd type="none" w="med" len="med"/>
-                    </a:lnL>
-                    <a:lnR w="12700" cap="flat" cmpd="sng" algn="ctr">
-                      <a:solidFill>
-                        <a:srgbClr val="A6A6A6"/>
-                      </a:solidFill>
-                      <a:prstDash val="sysDash"/>
-                      <a:round/>
-                      <a:headEnd type="none" w="med" len="med"/>
-                      <a:tailEnd type="none" w="med" len="med"/>
-                    </a:lnR>
-                    <a:lnT w="12700" cap="flat" cmpd="sng" algn="ctr">
-                      <a:solidFill>
-                        <a:srgbClr val="A6A6A6"/>
-                      </a:solidFill>
-                      <a:prstDash val="sysDash"/>
-                      <a:round/>
-                      <a:headEnd type="none" w="med" len="med"/>
-                      <a:tailEnd type="none" w="med" len="med"/>
-                    </a:lnT>
-                    <a:lnB w="0" cap="flat" cmpd="sng" algn="ctr">
-                      <a:solidFill>
-                        <a:srgbClr val="666666"/>
-                      </a:solidFill>
-                      <a:prstDash val="sysDash"/>
-                      <a:round/>
-                      <a:headEnd type="none" w="med" len="med"/>
-                      <a:tailEnd type="none" w="med" len="med"/>
-                    </a:lnB>
-                    <a:solidFill>
-                      <a:srgbClr val="BFBFBF">
-                        <a:alpha val="0"/>
-                      </a:srgbClr>
-                    </a:solidFill>
-                  </a:tcPr>
-                </a:tc>
-                <a:tc>
-                  <a:txBody>
-                    <a:bodyPr/>
-                    <a:lstStyle/>
-                    <a:p>
-                      <a:pPr marL="0" indent="0">
-                        <a:buNone/>
-                      </a:pPr>
-                      <a:endParaRPr lang="en-US" sz="1400" dirty="0">
-                        <a:latin typeface="Roboto" charset="0"/>
-                        <a:ea typeface="Roboto" charset="0"/>
-                        <a:cs typeface="Roboto" charset="0"/>
-                      </a:endParaRPr>
-                    </a:p>
-                  </a:txBody>
-                  <a:tcPr marL="73152" marR="73152" marT="73152" marB="73152" anchor="ctr">
-                    <a:lnL w="12700" cap="flat" cmpd="sng" algn="ctr">
-                      <a:solidFill>
-                        <a:srgbClr val="A6A6A6"/>
-                      </a:solidFill>
-                      <a:prstDash val="sysDash"/>
-                      <a:round/>
-                      <a:headEnd type="none" w="med" len="med"/>
-                      <a:tailEnd type="none" w="med" len="med"/>
-                    </a:lnL>
-                    <a:lnR w="12700" cap="flat" cmpd="sng" algn="ctr">
-                      <a:solidFill>
-                        <a:srgbClr val="A6A6A6"/>
-                      </a:solidFill>
-                      <a:prstDash val="sysDash"/>
-                      <a:round/>
-                      <a:headEnd type="none" w="med" len="med"/>
-                      <a:tailEnd type="none" w="med" len="med"/>
-                    </a:lnR>
-                    <a:lnT w="12700" cap="flat" cmpd="sng" algn="ctr">
-                      <a:solidFill>
-                        <a:srgbClr val="A6A6A6"/>
-                      </a:solidFill>
-                      <a:prstDash val="sysDash"/>
-                      <a:round/>
-                      <a:headEnd type="none" w="med" len="med"/>
-                      <a:tailEnd type="none" w="med" len="med"/>
-                    </a:lnT>
-                    <a:lnB w="0" cap="flat" cmpd="sng" algn="ctr">
-                      <a:solidFill>
-                        <a:srgbClr val="666666"/>
-                      </a:solidFill>
-                      <a:prstDash val="sysDash"/>
-                      <a:round/>
-                      <a:headEnd type="none" w="med" len="med"/>
-                      <a:tailEnd type="none" w="med" len="med"/>
-                    </a:lnB>
-                    <a:solidFill>
-                      <a:srgbClr val="BFBFBF">
-                        <a:alpha val="0"/>
-                      </a:srgbClr>
-                    </a:solidFill>
-                  </a:tcPr>
-                </a:tc>
-                <a:tc>
-                  <a:txBody>
-                    <a:bodyPr/>
-                    <a:lstStyle/>
-                    <a:p>
-                      <a:pPr marL="0" indent="0">
-                        <a:buNone/>
-                      </a:pPr>
-                      <a:endParaRPr lang="en-US" sz="1400" dirty="0">
-                        <a:latin typeface="Roboto" charset="0"/>
-                        <a:ea typeface="Roboto" charset="0"/>
-                        <a:cs typeface="Roboto" charset="0"/>
-                      </a:endParaRPr>
-                    </a:p>
-                  </a:txBody>
-                  <a:tcPr marL="73152" marR="73152" marT="73152" marB="73152" anchor="ctr">
-                    <a:lnL w="12700" cap="flat" cmpd="sng" algn="ctr">
-                      <a:solidFill>
-                        <a:srgbClr val="A6A6A6"/>
-                      </a:solidFill>
-                      <a:prstDash val="sysDash"/>
-                      <a:round/>
-                      <a:headEnd type="none" w="med" len="med"/>
-                      <a:tailEnd type="none" w="med" len="med"/>
-                    </a:lnL>
-                    <a:lnR w="0" cap="flat" cmpd="sng" algn="ctr">
-                      <a:solidFill>
-                        <a:srgbClr val="666666"/>
-                      </a:solidFill>
-                      <a:prstDash val="sysDash"/>
-                      <a:round/>
-                      <a:headEnd type="none" w="med" len="med"/>
-                      <a:tailEnd type="none" w="med" len="med"/>
-                    </a:lnR>
-                    <a:lnT w="12700" cap="flat" cmpd="sng" algn="ctr">
-                      <a:solidFill>
-                        <a:srgbClr val="A6A6A6"/>
-                      </a:solidFill>
-                      <a:prstDash val="sysDash"/>
-                      <a:round/>
-                      <a:headEnd type="none" w="med" len="med"/>
-                      <a:tailEnd type="none" w="med" len="med"/>
-                    </a:lnT>
-                    <a:lnB w="0" cap="flat" cmpd="sng" algn="ctr">
-                      <a:solidFill>
-                        <a:srgbClr val="666666"/>
-                      </a:solidFill>
-                      <a:prstDash val="sysDash"/>
-                      <a:round/>
-                      <a:headEnd type="none" w="med" len="med"/>
-                      <a:tailEnd type="none" w="med" len="med"/>
-                    </a:lnB>
-                    <a:solidFill>
-                      <a:srgbClr val="BFBFBF">
-                        <a:alpha val="0"/>
-                      </a:srgbClr>
-                    </a:solidFill>
-                  </a:tcPr>
-                </a:tc>
-                <a:extLst>
-                  <a:ext uri="{0D108BD9-81ED-4DB2-BD59-A6C34878D82A}">
-                    <a16:rowId xmlns:a16="http://schemas.microsoft.com/office/drawing/2014/main" val="10004"/>
-                  </a:ext>
-                </a:extLst>
-              </a:tr>
             </a:tbl>
           </a:graphicData>
         </a:graphic>
@@ -12302,7 +11799,7 @@
 </p:sld>
 </file>
 
-<file path=ppt/slides/slide6.xml><?xml version="1.0" encoding="utf-8"?>
+<file path=ppt/slides/slide5.xml><?xml version="1.0" encoding="utf-8"?>
 <p:sld xmlns:a="http://schemas.openxmlformats.org/drawingml/2006/main" xmlns:r="http://schemas.openxmlformats.org/officeDocument/2006/relationships" xmlns:p="http://schemas.openxmlformats.org/presentationml/2006/main">
   <p:cSld>
     <p:spTree>
@@ -12655,7 +12152,7 @@
 </p:sld>
 </file>
 
-<file path=ppt/slides/slide7.xml><?xml version="1.0" encoding="utf-8"?>
+<file path=ppt/slides/slide6.xml><?xml version="1.0" encoding="utf-8"?>
 <p:sld xmlns:a="http://schemas.openxmlformats.org/drawingml/2006/main" xmlns:r="http://schemas.openxmlformats.org/officeDocument/2006/relationships" xmlns:p="http://schemas.openxmlformats.org/presentationml/2006/main">
   <p:cSld>
     <p:spTree>
@@ -13287,7 +12784,7 @@
 </p:sld>
 </file>
 
-<file path=ppt/slides/slide8.xml><?xml version="1.0" encoding="utf-8"?>
+<file path=ppt/slides/slide7.xml><?xml version="1.0" encoding="utf-8"?>
 <p:sld xmlns:a="http://schemas.openxmlformats.org/drawingml/2006/main" xmlns:r="http://schemas.openxmlformats.org/officeDocument/2006/relationships" xmlns:p="http://schemas.openxmlformats.org/presentationml/2006/main">
   <p:cSld>
     <p:spTree>
@@ -13552,7 +13049,7 @@
 </p:sld>
 </file>
 
-<file path=ppt/slides/slide9.xml><?xml version="1.0" encoding="utf-8"?>
+<file path=ppt/slides/slide8.xml><?xml version="1.0" encoding="utf-8"?>
 <p:sld xmlns:a="http://schemas.openxmlformats.org/drawingml/2006/main" xmlns:r="http://schemas.openxmlformats.org/officeDocument/2006/relationships" xmlns:p="http://schemas.openxmlformats.org/presentationml/2006/main">
   <p:cSld>
     <p:spTree>

--- a/Executive Summary.pptx
+++ b/Executive Summary.pptx
@@ -12,11 +12,11 @@
     <p:sldId id="256" r:id="rId3"/>
     <p:sldId id="257" r:id="rId4"/>
     <p:sldId id="259" r:id="rId5"/>
-    <p:sldId id="262" r:id="rId6"/>
-    <p:sldId id="263" r:id="rId7"/>
-    <p:sldId id="261" r:id="rId8"/>
-    <p:sldId id="264" r:id="rId9"/>
-    <p:sldId id="265" r:id="rId10"/>
+    <p:sldId id="266" r:id="rId6"/>
+    <p:sldId id="267" r:id="rId7"/>
+    <p:sldId id="262" r:id="rId8"/>
+    <p:sldId id="263" r:id="rId9"/>
+    <p:sldId id="261" r:id="rId10"/>
   </p:sldIdLst>
   <p:sldSz cx="12192000" cy="6858000"/>
   <p:notesSz cx="6858000" cy="9144000"/>
@@ -537,7 +537,7 @@
           <a:p>
             <a:fld id="{F7021451-1387-4CA6-816F-3879F97B5CBC}" type="slidenum">
               <a:rPr lang="en-US"/>
-              <a:t>4</a:t>
+              <a:t>6</a:t>
             </a:fld>
             <a:endParaRPr lang="en-US"/>
           </a:p>
@@ -9688,6 +9688,436 @@
 
 <file path=ppt/slides/slide4.xml><?xml version="1.0" encoding="utf-8"?>
 <p:sld xmlns:a="http://schemas.openxmlformats.org/drawingml/2006/main" xmlns:r="http://schemas.openxmlformats.org/officeDocument/2006/relationships" xmlns:p="http://schemas.openxmlformats.org/presentationml/2006/main">
+  <p:cSld>
+    <p:spTree>
+      <p:nvGrpSpPr>
+        <p:cNvPr id="1" name=""/>
+        <p:cNvGrpSpPr/>
+        <p:nvPr/>
+      </p:nvGrpSpPr>
+      <p:grpSpPr>
+        <a:xfrm>
+          <a:off x="0" y="0"/>
+          <a:ext cx="0" cy="0"/>
+          <a:chOff x="0" y="0"/>
+          <a:chExt cx="0" cy="0"/>
+        </a:xfrm>
+      </p:grpSpPr>
+      <p:sp>
+        <p:nvSpPr>
+          <p:cNvPr id="2" name="Title 1">
+            <a:extLst>
+              <a:ext uri="{FF2B5EF4-FFF2-40B4-BE49-F238E27FC236}">
+                <a16:creationId xmlns:a16="http://schemas.microsoft.com/office/drawing/2014/main" id="{0FE7558C-C6B4-6B3E-CAF1-9374D71F4D76}"/>
+              </a:ext>
+            </a:extLst>
+          </p:cNvPr>
+          <p:cNvSpPr>
+            <a:spLocks noGrp="1"/>
+          </p:cNvSpPr>
+          <p:nvPr>
+            <p:ph type="title"/>
+          </p:nvPr>
+        </p:nvSpPr>
+        <p:spPr>
+          <a:xfrm>
+            <a:off x="202194" y="136526"/>
+            <a:ext cx="10972800" cy="995158"/>
+          </a:xfrm>
+        </p:spPr>
+        <p:txBody>
+          <a:bodyPr/>
+          <a:lstStyle/>
+          <a:p>
+            <a:r>
+              <a:rPr lang="en-US" dirty="0"/>
+              <a:t>Exploratory Data Analysis</a:t>
+            </a:r>
+          </a:p>
+        </p:txBody>
+      </p:sp>
+      <p:sp>
+        <p:nvSpPr>
+          <p:cNvPr id="10" name="Text Placeholder 9">
+            <a:extLst>
+              <a:ext uri="{FF2B5EF4-FFF2-40B4-BE49-F238E27FC236}">
+                <a16:creationId xmlns:a16="http://schemas.microsoft.com/office/drawing/2014/main" id="{C56ADE05-89E3-2A8B-04ED-91079BF75B47}"/>
+              </a:ext>
+            </a:extLst>
+          </p:cNvPr>
+          <p:cNvSpPr>
+            <a:spLocks noGrp="1"/>
+          </p:cNvSpPr>
+          <p:nvPr>
+            <p:ph type="body" sz="quarter" idx="22"/>
+          </p:nvPr>
+        </p:nvSpPr>
+        <p:spPr/>
+        <p:txBody>
+          <a:bodyPr/>
+          <a:lstStyle/>
+          <a:p>
+            <a:endParaRPr lang="en-US"/>
+          </a:p>
+        </p:txBody>
+      </p:sp>
+      <p:pic>
+        <p:nvPicPr>
+          <p:cNvPr id="12" name="Picture 11">
+            <a:extLst>
+              <a:ext uri="{FF2B5EF4-FFF2-40B4-BE49-F238E27FC236}">
+                <a16:creationId xmlns:a16="http://schemas.microsoft.com/office/drawing/2014/main" id="{D5D56859-F901-A0AE-85B5-6228D60AC576}"/>
+              </a:ext>
+            </a:extLst>
+          </p:cNvPr>
+          <p:cNvPicPr>
+            <a:picLocks noChangeAspect="1"/>
+          </p:cNvPicPr>
+          <p:nvPr/>
+        </p:nvPicPr>
+        <p:blipFill>
+          <a:blip r:embed="rId2"/>
+          <a:stretch>
+            <a:fillRect/>
+          </a:stretch>
+        </p:blipFill>
+        <p:spPr>
+          <a:xfrm>
+            <a:off x="7016435" y="3664263"/>
+            <a:ext cx="5143226" cy="3274493"/>
+          </a:xfrm>
+          <a:prstGeom prst="rect">
+            <a:avLst/>
+          </a:prstGeom>
+        </p:spPr>
+      </p:pic>
+      <p:pic>
+        <p:nvPicPr>
+          <p:cNvPr id="13" name="Picture 12">
+            <a:extLst>
+              <a:ext uri="{FF2B5EF4-FFF2-40B4-BE49-F238E27FC236}">
+                <a16:creationId xmlns:a16="http://schemas.microsoft.com/office/drawing/2014/main" id="{AB2D2813-8301-0A41-6419-66816585089E}"/>
+              </a:ext>
+            </a:extLst>
+          </p:cNvPr>
+          <p:cNvPicPr>
+            <a:picLocks noChangeAspect="1" noChangeArrowheads="1"/>
+          </p:cNvPicPr>
+          <p:nvPr/>
+        </p:nvPicPr>
+        <p:blipFill>
+          <a:blip r:embed="rId3">
+            <a:extLst>
+              <a:ext uri="{28A0092B-C50C-407E-A947-70E740481C1C}">
+                <a14:useLocalDpi xmlns:a14="http://schemas.microsoft.com/office/drawing/2010/main" val="0"/>
+              </a:ext>
+            </a:extLst>
+          </a:blip>
+          <a:srcRect/>
+          <a:stretch>
+            <a:fillRect/>
+          </a:stretch>
+        </p:blipFill>
+        <p:spPr bwMode="auto">
+          <a:xfrm>
+            <a:off x="7016435" y="-30236"/>
+            <a:ext cx="5143225" cy="3619789"/>
+          </a:xfrm>
+          <a:prstGeom prst="rect">
+            <a:avLst/>
+          </a:prstGeom>
+          <a:noFill/>
+          <a:extLst>
+            <a:ext uri="{909E8E84-426E-40DD-AFC4-6F175D3DCCD1}">
+              <a14:hiddenFill xmlns:a14="http://schemas.microsoft.com/office/drawing/2010/main">
+                <a:solidFill>
+                  <a:srgbClr val="FFFFFF"/>
+                </a:solidFill>
+              </a14:hiddenFill>
+            </a:ext>
+          </a:extLst>
+        </p:spPr>
+      </p:pic>
+      <p:sp>
+        <p:nvSpPr>
+          <p:cNvPr id="14" name="TextBox 13">
+            <a:extLst>
+              <a:ext uri="{FF2B5EF4-FFF2-40B4-BE49-F238E27FC236}">
+                <a16:creationId xmlns:a16="http://schemas.microsoft.com/office/drawing/2014/main" id="{F977DE26-1D7D-7BF4-68C0-E018BC795FAD}"/>
+              </a:ext>
+            </a:extLst>
+          </p:cNvPr>
+          <p:cNvSpPr txBox="1"/>
+          <p:nvPr/>
+        </p:nvSpPr>
+        <p:spPr>
+          <a:xfrm>
+            <a:off x="832919" y="1674674"/>
+            <a:ext cx="4608214" cy="2564805"/>
+          </a:xfrm>
+          <a:prstGeom prst="rect">
+            <a:avLst/>
+          </a:prstGeom>
+          <a:noFill/>
+        </p:spPr>
+        <p:txBody>
+          <a:bodyPr wrap="square" rtlCol="0">
+            <a:spAutoFit/>
+          </a:bodyPr>
+          <a:lstStyle/>
+          <a:p>
+            <a:pPr marL="285750" indent="-285750">
+              <a:spcAft>
+                <a:spcPts val="1000"/>
+              </a:spcAft>
+              <a:buFont typeface="Arial" panose="020B0604020202020204" pitchFamily="34" charset="0"/>
+              <a:buChar char="•"/>
+            </a:pPr>
+            <a:r>
+              <a:rPr lang="en-US" dirty="0"/>
+              <a:t>&gt;50% employees work over 200 hours per month, some steps into 300 hours territory.</a:t>
+            </a:r>
+          </a:p>
+          <a:p>
+            <a:pPr marL="285750" indent="-285750">
+              <a:spcAft>
+                <a:spcPts val="1000"/>
+              </a:spcAft>
+              <a:buFont typeface="Arial" panose="020B0604020202020204" pitchFamily="34" charset="0"/>
+              <a:buChar char="•"/>
+            </a:pPr>
+            <a:r>
+              <a:rPr lang="en-US" dirty="0"/>
+              <a:t>Many overworked employees have too many projects which strongly correlated with leaving the company.</a:t>
+            </a:r>
+          </a:p>
+          <a:p>
+            <a:pPr marL="285750" indent="-285750">
+              <a:buFont typeface="Arial" panose="020B0604020202020204" pitchFamily="34" charset="0"/>
+              <a:buChar char="•"/>
+            </a:pPr>
+            <a:r>
+              <a:rPr lang="en-US" dirty="0"/>
+              <a:t>Few employees stay after given more than 4 projects and work 200+ hours per month.</a:t>
+            </a:r>
+          </a:p>
+          <a:p>
+            <a:pPr marL="285750" indent="-285750">
+              <a:buFont typeface="Arial" panose="020B0604020202020204" pitchFamily="34" charset="0"/>
+              <a:buChar char="•"/>
+            </a:pPr>
+            <a:endParaRPr lang="en-US" dirty="0"/>
+          </a:p>
+        </p:txBody>
+      </p:sp>
+    </p:spTree>
+    <p:extLst>
+      <p:ext uri="{BB962C8B-B14F-4D97-AF65-F5344CB8AC3E}">
+        <p14:creationId xmlns:p14="http://schemas.microsoft.com/office/powerpoint/2010/main" val="1709728656"/>
+      </p:ext>
+    </p:extLst>
+  </p:cSld>
+  <p:clrMapOvr>
+    <a:masterClrMapping/>
+  </p:clrMapOvr>
+</p:sld>
+</file>
+
+<file path=ppt/slides/slide5.xml><?xml version="1.0" encoding="utf-8"?>
+<p:sld xmlns:a="http://schemas.openxmlformats.org/drawingml/2006/main" xmlns:r="http://schemas.openxmlformats.org/officeDocument/2006/relationships" xmlns:p="http://schemas.openxmlformats.org/presentationml/2006/main">
+  <p:cSld>
+    <p:spTree>
+      <p:nvGrpSpPr>
+        <p:cNvPr id="1" name=""/>
+        <p:cNvGrpSpPr/>
+        <p:nvPr/>
+      </p:nvGrpSpPr>
+      <p:grpSpPr>
+        <a:xfrm>
+          <a:off x="0" y="0"/>
+          <a:ext cx="0" cy="0"/>
+          <a:chOff x="0" y="0"/>
+          <a:chExt cx="0" cy="0"/>
+        </a:xfrm>
+      </p:grpSpPr>
+      <p:sp>
+        <p:nvSpPr>
+          <p:cNvPr id="10" name="Text Placeholder 9">
+            <a:extLst>
+              <a:ext uri="{FF2B5EF4-FFF2-40B4-BE49-F238E27FC236}">
+                <a16:creationId xmlns:a16="http://schemas.microsoft.com/office/drawing/2014/main" id="{4C443E12-438C-9E11-612D-EF28BD4C59D9}"/>
+              </a:ext>
+            </a:extLst>
+          </p:cNvPr>
+          <p:cNvSpPr>
+            <a:spLocks noGrp="1"/>
+          </p:cNvSpPr>
+          <p:nvPr>
+            <p:ph type="body" sz="quarter" idx="22"/>
+          </p:nvPr>
+        </p:nvSpPr>
+        <p:spPr>
+          <a:xfrm>
+            <a:off x="291967" y="772522"/>
+            <a:ext cx="5275914" cy="5151828"/>
+          </a:xfrm>
+        </p:spPr>
+        <p:txBody>
+          <a:bodyPr/>
+          <a:lstStyle/>
+          <a:p>
+            <a:pPr marL="285750" indent="-285750" algn="l">
+              <a:buFont typeface="Arial" panose="020B0604020202020204" pitchFamily="34" charset="0"/>
+              <a:buChar char="•"/>
+            </a:pPr>
+            <a:r>
+              <a:rPr lang="en-US" sz="1600" dirty="0">
+                <a:solidFill>
+                  <a:schemeClr val="tx1"/>
+                </a:solidFill>
+              </a:rPr>
+              <a:t>Evaluations also plays a big role.</a:t>
+            </a:r>
+          </a:p>
+          <a:p>
+            <a:pPr marL="285750" indent="-285750" algn="l">
+              <a:buFont typeface="Arial" panose="020B0604020202020204" pitchFamily="34" charset="0"/>
+              <a:buChar char="•"/>
+            </a:pPr>
+            <a:r>
+              <a:rPr lang="en-US" sz="1600" dirty="0">
+                <a:solidFill>
+                  <a:schemeClr val="tx1"/>
+                </a:solidFill>
+              </a:rPr>
+              <a:t>High work hour/high evaluation employees and low work hour/low evaluation employees both have high turnover rate.</a:t>
+            </a:r>
+          </a:p>
+          <a:p>
+            <a:pPr marL="285750" indent="-285750" algn="l">
+              <a:buFont typeface="Arial" panose="020B0604020202020204" pitchFamily="34" charset="0"/>
+              <a:buChar char="•"/>
+            </a:pPr>
+            <a:r>
+              <a:rPr lang="en-US" sz="1600" dirty="0">
+                <a:solidFill>
+                  <a:schemeClr val="tx1"/>
+                </a:solidFill>
+              </a:rPr>
+              <a:t>Some investigate shows that high evaluation employees get lower salary and less promotion, which may lead to low satisfaction.</a:t>
+            </a:r>
+          </a:p>
+        </p:txBody>
+      </p:sp>
+      <p:pic>
+        <p:nvPicPr>
+          <p:cNvPr id="11" name="Picture 10">
+            <a:extLst>
+              <a:ext uri="{FF2B5EF4-FFF2-40B4-BE49-F238E27FC236}">
+                <a16:creationId xmlns:a16="http://schemas.microsoft.com/office/drawing/2014/main" id="{EFE62CD2-F134-3771-C46E-47B458CE7884}"/>
+              </a:ext>
+            </a:extLst>
+          </p:cNvPr>
+          <p:cNvPicPr>
+            <a:picLocks noChangeAspect="1" noChangeArrowheads="1"/>
+          </p:cNvPicPr>
+          <p:nvPr/>
+        </p:nvPicPr>
+        <p:blipFill>
+          <a:blip r:embed="rId2">
+            <a:extLst>
+              <a:ext uri="{28A0092B-C50C-407E-A947-70E740481C1C}">
+                <a14:useLocalDpi xmlns:a14="http://schemas.microsoft.com/office/drawing/2010/main" val="0"/>
+              </a:ext>
+            </a:extLst>
+          </a:blip>
+          <a:srcRect/>
+          <a:stretch>
+            <a:fillRect/>
+          </a:stretch>
+        </p:blipFill>
+        <p:spPr bwMode="auto">
+          <a:xfrm>
+            <a:off x="5893295" y="-18941"/>
+            <a:ext cx="6272658" cy="3654622"/>
+          </a:xfrm>
+          <a:prstGeom prst="rect">
+            <a:avLst/>
+          </a:prstGeom>
+          <a:noFill/>
+          <a:extLst>
+            <a:ext uri="{909E8E84-426E-40DD-AFC4-6F175D3DCCD1}">
+              <a14:hiddenFill xmlns:a14="http://schemas.microsoft.com/office/drawing/2010/main">
+                <a:solidFill>
+                  <a:srgbClr val="FFFFFF"/>
+                </a:solidFill>
+              </a14:hiddenFill>
+            </a:ext>
+          </a:extLst>
+        </p:spPr>
+      </p:pic>
+      <p:pic>
+        <p:nvPicPr>
+          <p:cNvPr id="12" name="Picture 14">
+            <a:extLst>
+              <a:ext uri="{FF2B5EF4-FFF2-40B4-BE49-F238E27FC236}">
+                <a16:creationId xmlns:a16="http://schemas.microsoft.com/office/drawing/2014/main" id="{888F5790-EC39-F368-7B0E-108E1D8410C8}"/>
+              </a:ext>
+            </a:extLst>
+          </p:cNvPr>
+          <p:cNvPicPr>
+            <a:picLocks noChangeAspect="1" noChangeArrowheads="1"/>
+          </p:cNvPicPr>
+          <p:nvPr/>
+        </p:nvPicPr>
+        <p:blipFill>
+          <a:blip r:embed="rId3">
+            <a:extLst>
+              <a:ext uri="{28A0092B-C50C-407E-A947-70E740481C1C}">
+                <a14:useLocalDpi xmlns:a14="http://schemas.microsoft.com/office/drawing/2010/main" val="0"/>
+              </a:ext>
+            </a:extLst>
+          </a:blip>
+          <a:srcRect/>
+          <a:stretch>
+            <a:fillRect/>
+          </a:stretch>
+        </p:blipFill>
+        <p:spPr bwMode="auto">
+          <a:xfrm>
+            <a:off x="5893295" y="3635681"/>
+            <a:ext cx="6069952" cy="3222320"/>
+          </a:xfrm>
+          <a:prstGeom prst="rect">
+            <a:avLst/>
+          </a:prstGeom>
+          <a:noFill/>
+          <a:extLst>
+            <a:ext uri="{909E8E84-426E-40DD-AFC4-6F175D3DCCD1}">
+              <a14:hiddenFill xmlns:a14="http://schemas.microsoft.com/office/drawing/2010/main">
+                <a:solidFill>
+                  <a:srgbClr val="FFFFFF"/>
+                </a:solidFill>
+              </a14:hiddenFill>
+            </a:ext>
+          </a:extLst>
+        </p:spPr>
+      </p:pic>
+    </p:spTree>
+    <p:extLst>
+      <p:ext uri="{BB962C8B-B14F-4D97-AF65-F5344CB8AC3E}">
+        <p14:creationId xmlns:p14="http://schemas.microsoft.com/office/powerpoint/2010/main" val="1809763212"/>
+      </p:ext>
+    </p:extLst>
+  </p:cSld>
+  <p:clrMapOvr>
+    <a:masterClrMapping/>
+  </p:clrMapOvr>
+</p:sld>
+</file>
+
+<file path=ppt/slides/slide6.xml><?xml version="1.0" encoding="utf-8"?>
+<p:sld xmlns:a="http://schemas.openxmlformats.org/drawingml/2006/main" xmlns:r="http://schemas.openxmlformats.org/officeDocument/2006/relationships" xmlns:p="http://schemas.openxmlformats.org/presentationml/2006/main">
   <p:cSld name="Slide 1">
     <p:bg>
       <p:bgPr>
@@ -9720,19 +10150,21 @@
           <p:nvPr>
             <p:extLst>
               <p:ext uri="{D42A27DB-BD31-4B8C-83A1-F6EECF244321}">
-                <p14:modId xmlns:p14="http://schemas.microsoft.com/office/powerpoint/2010/main" val="311521977"/>
+                <p14:modId xmlns:p14="http://schemas.microsoft.com/office/powerpoint/2010/main" val="4106968200"/>
               </p:ext>
             </p:extLst>
           </p:nvPr>
         </p:nvGraphicFramePr>
         <p:xfrm>
-          <a:off x="609600" y="2804160"/>
+          <a:off x="609600" y="2445190"/>
           <a:ext cx="10363202" cy="2145792"/>
         </p:xfrm>
         <a:graphic>
           <a:graphicData uri="http://schemas.openxmlformats.org/drawingml/2006/table">
             <a:tbl>
-              <a:tblPr/>
+              <a:tblPr>
+                <a:tableStyleId>{8EC20E35-A176-4012-BC5E-935CFFF8708E}</a:tableStyleId>
+              </a:tblPr>
               <a:tblGrid>
                 <a:gridCol w="1758215">
                   <a:extLst>
@@ -9791,9 +10223,6 @@
                           <a:solidFill>
                             <a:schemeClr val="accent1"/>
                           </a:solidFill>
-                          <a:latin typeface="Roboto" pitchFamily="34" charset="0"/>
-                          <a:ea typeface="Roboto" pitchFamily="34" charset="-122"/>
-                          <a:cs typeface="Roboto" pitchFamily="34" charset="-120"/>
                         </a:rPr>
                         <a:t>Model Version</a:t>
                       </a:r>
@@ -9807,49 +10236,7 @@
                       </a:endParaRPr>
                     </a:p>
                   </a:txBody>
-                  <a:tcPr marL="73152" marR="73152" marT="73152" marB="73152" anchor="ctr">
-                    <a:lnL w="0" cap="flat" cmpd="sng" algn="ctr">
-                      <a:solidFill>
-                        <a:srgbClr val="666666"/>
-                      </a:solidFill>
-                      <a:prstDash val="sysDash"/>
-                      <a:round/>
-                      <a:headEnd type="none" w="med" len="med"/>
-                      <a:tailEnd type="none" w="med" len="med"/>
-                    </a:lnL>
-                    <a:lnR w="12700" cap="flat" cmpd="sng" algn="ctr">
-                      <a:solidFill>
-                        <a:srgbClr val="A6A6A6"/>
-                      </a:solidFill>
-                      <a:prstDash val="sysDash"/>
-                      <a:round/>
-                      <a:headEnd type="none" w="med" len="med"/>
-                      <a:tailEnd type="none" w="med" len="med"/>
-                    </a:lnR>
-                    <a:lnT w="0" cap="flat" cmpd="sng" algn="ctr">
-                      <a:solidFill>
-                        <a:srgbClr val="666666"/>
-                      </a:solidFill>
-                      <a:prstDash val="sysDash"/>
-                      <a:round/>
-                      <a:headEnd type="none" w="med" len="med"/>
-                      <a:tailEnd type="none" w="med" len="med"/>
-                    </a:lnT>
-                    <a:lnB w="12700" cap="flat" cmpd="sng" algn="ctr">
-                      <a:solidFill>
-                        <a:srgbClr val="A6A6A6"/>
-                      </a:solidFill>
-                      <a:prstDash val="sysDash"/>
-                      <a:round/>
-                      <a:headEnd type="none" w="med" len="med"/>
-                      <a:tailEnd type="none" w="med" len="med"/>
-                    </a:lnB>
-                    <a:solidFill>
-                      <a:srgbClr val="BFBFBF">
-                        <a:alpha val="0"/>
-                      </a:srgbClr>
-                    </a:solidFill>
-                  </a:tcPr>
+                  <a:tcPr marL="73152" marR="73152" marT="73152" marB="73152" anchor="ctr"/>
                 </a:tc>
                 <a:tc>
                   <a:txBody>
@@ -9864,9 +10251,6 @@
                           <a:solidFill>
                             <a:schemeClr val="accent1"/>
                           </a:solidFill>
-                          <a:latin typeface="Roboto" pitchFamily="34" charset="0"/>
-                          <a:ea typeface="Roboto" pitchFamily="34" charset="-122"/>
-                          <a:cs typeface="Roboto" pitchFamily="34" charset="-120"/>
                         </a:rPr>
                         <a:t>Accuracy </a:t>
                       </a:r>
@@ -9880,49 +10264,7 @@
                       </a:endParaRPr>
                     </a:p>
                   </a:txBody>
-                  <a:tcPr marL="73152" marR="73152" marT="73152" marB="73152" anchor="ctr">
-                    <a:lnL w="12700" cap="flat" cmpd="sng" algn="ctr">
-                      <a:solidFill>
-                        <a:srgbClr val="A6A6A6"/>
-                      </a:solidFill>
-                      <a:prstDash val="sysDash"/>
-                      <a:round/>
-                      <a:headEnd type="none" w="med" len="med"/>
-                      <a:tailEnd type="none" w="med" len="med"/>
-                    </a:lnL>
-                    <a:lnR w="12700" cap="flat" cmpd="sng" algn="ctr">
-                      <a:solidFill>
-                        <a:srgbClr val="A6A6A6"/>
-                      </a:solidFill>
-                      <a:prstDash val="sysDash"/>
-                      <a:round/>
-                      <a:headEnd type="none" w="med" len="med"/>
-                      <a:tailEnd type="none" w="med" len="med"/>
-                    </a:lnR>
-                    <a:lnT w="0" cap="flat" cmpd="sng" algn="ctr">
-                      <a:solidFill>
-                        <a:srgbClr val="666666"/>
-                      </a:solidFill>
-                      <a:prstDash val="sysDash"/>
-                      <a:round/>
-                      <a:headEnd type="none" w="med" len="med"/>
-                      <a:tailEnd type="none" w="med" len="med"/>
-                    </a:lnT>
-                    <a:lnB w="12700" cap="flat" cmpd="sng" algn="ctr">
-                      <a:solidFill>
-                        <a:srgbClr val="A6A6A6"/>
-                      </a:solidFill>
-                      <a:prstDash val="sysDash"/>
-                      <a:round/>
-                      <a:headEnd type="none" w="med" len="med"/>
-                      <a:tailEnd type="none" w="med" len="med"/>
-                    </a:lnB>
-                    <a:solidFill>
-                      <a:srgbClr val="BFBFBF">
-                        <a:alpha val="0"/>
-                      </a:srgbClr>
-                    </a:solidFill>
-                  </a:tcPr>
+                  <a:tcPr marL="73152" marR="73152" marT="73152" marB="73152" anchor="ctr"/>
                 </a:tc>
                 <a:tc>
                   <a:txBody>
@@ -9937,57 +10279,20 @@
                           <a:solidFill>
                             <a:schemeClr val="accent1"/>
                           </a:solidFill>
-                          <a:latin typeface="Roboto" charset="0"/>
-                          <a:ea typeface="Roboto" charset="0"/>
-                          <a:cs typeface="Roboto" charset="0"/>
                         </a:rPr>
                         <a:t>Precision</a:t>
                       </a:r>
+                      <a:endParaRPr lang="en-US" sz="1400" b="1" dirty="0">
+                        <a:solidFill>
+                          <a:schemeClr val="accent1"/>
+                        </a:solidFill>
+                        <a:latin typeface="Roboto" charset="0"/>
+                        <a:ea typeface="Roboto" charset="0"/>
+                        <a:cs typeface="Roboto" charset="0"/>
+                      </a:endParaRPr>
                     </a:p>
                   </a:txBody>
-                  <a:tcPr marL="73152" marR="73152" marT="73152" marB="73152" anchor="ctr">
-                    <a:lnL w="12700" cap="flat" cmpd="sng" algn="ctr">
-                      <a:solidFill>
-                        <a:srgbClr val="A6A6A6"/>
-                      </a:solidFill>
-                      <a:prstDash val="sysDash"/>
-                      <a:round/>
-                      <a:headEnd type="none" w="med" len="med"/>
-                      <a:tailEnd type="none" w="med" len="med"/>
-                    </a:lnL>
-                    <a:lnR w="12700" cap="flat" cmpd="sng" algn="ctr">
-                      <a:solidFill>
-                        <a:srgbClr val="A6A6A6"/>
-                      </a:solidFill>
-                      <a:prstDash val="sysDash"/>
-                      <a:round/>
-                      <a:headEnd type="none" w="med" len="med"/>
-                      <a:tailEnd type="none" w="med" len="med"/>
-                    </a:lnR>
-                    <a:lnT w="0" cap="flat" cmpd="sng" algn="ctr">
-                      <a:solidFill>
-                        <a:srgbClr val="666666"/>
-                      </a:solidFill>
-                      <a:prstDash val="sysDash"/>
-                      <a:round/>
-                      <a:headEnd type="none" w="med" len="med"/>
-                      <a:tailEnd type="none" w="med" len="med"/>
-                    </a:lnT>
-                    <a:lnB w="12700" cap="flat" cmpd="sng" algn="ctr">
-                      <a:solidFill>
-                        <a:srgbClr val="A6A6A6"/>
-                      </a:solidFill>
-                      <a:prstDash val="sysDash"/>
-                      <a:round/>
-                      <a:headEnd type="none" w="med" len="med"/>
-                      <a:tailEnd type="none" w="med" len="med"/>
-                    </a:lnB>
-                    <a:solidFill>
-                      <a:srgbClr val="BFBFBF">
-                        <a:alpha val="0"/>
-                      </a:srgbClr>
-                    </a:solidFill>
-                  </a:tcPr>
+                  <a:tcPr marL="73152" marR="73152" marT="73152" marB="73152" anchor="ctr"/>
                 </a:tc>
                 <a:tc>
                   <a:txBody>
@@ -10002,57 +10307,20 @@
                           <a:solidFill>
                             <a:schemeClr val="accent1"/>
                           </a:solidFill>
-                          <a:latin typeface="Roboto" charset="0"/>
-                          <a:ea typeface="Roboto" charset="0"/>
-                          <a:cs typeface="Roboto" charset="0"/>
                         </a:rPr>
                         <a:t>Recall</a:t>
                       </a:r>
+                      <a:endParaRPr lang="en-US" sz="1400" b="1" dirty="0">
+                        <a:solidFill>
+                          <a:schemeClr val="accent1"/>
+                        </a:solidFill>
+                        <a:latin typeface="Roboto" charset="0"/>
+                        <a:ea typeface="Roboto" charset="0"/>
+                        <a:cs typeface="Roboto" charset="0"/>
+                      </a:endParaRPr>
                     </a:p>
                   </a:txBody>
-                  <a:tcPr marL="73152" marR="73152" marT="73152" marB="73152" anchor="ctr">
-                    <a:lnL w="12700" cap="flat" cmpd="sng" algn="ctr">
-                      <a:solidFill>
-                        <a:srgbClr val="A6A6A6"/>
-                      </a:solidFill>
-                      <a:prstDash val="sysDash"/>
-                      <a:round/>
-                      <a:headEnd type="none" w="med" len="med"/>
-                      <a:tailEnd type="none" w="med" len="med"/>
-                    </a:lnL>
-                    <a:lnR w="12700" cap="flat" cmpd="sng" algn="ctr">
-                      <a:solidFill>
-                        <a:srgbClr val="A6A6A6"/>
-                      </a:solidFill>
-                      <a:prstDash val="sysDash"/>
-                      <a:round/>
-                      <a:headEnd type="none" w="med" len="med"/>
-                      <a:tailEnd type="none" w="med" len="med"/>
-                    </a:lnR>
-                    <a:lnT w="0" cap="flat" cmpd="sng" algn="ctr">
-                      <a:solidFill>
-                        <a:srgbClr val="666666"/>
-                      </a:solidFill>
-                      <a:prstDash val="sysDash"/>
-                      <a:round/>
-                      <a:headEnd type="none" w="med" len="med"/>
-                      <a:tailEnd type="none" w="med" len="med"/>
-                    </a:lnT>
-                    <a:lnB w="12700" cap="flat" cmpd="sng" algn="ctr">
-                      <a:solidFill>
-                        <a:srgbClr val="A6A6A6"/>
-                      </a:solidFill>
-                      <a:prstDash val="sysDash"/>
-                      <a:round/>
-                      <a:headEnd type="none" w="med" len="med"/>
-                      <a:tailEnd type="none" w="med" len="med"/>
-                    </a:lnB>
-                    <a:solidFill>
-                      <a:srgbClr val="BFBFBF">
-                        <a:alpha val="0"/>
-                      </a:srgbClr>
-                    </a:solidFill>
-                  </a:tcPr>
+                  <a:tcPr marL="73152" marR="73152" marT="73152" marB="73152" anchor="ctr"/>
                 </a:tc>
                 <a:tc>
                   <a:txBody>
@@ -10067,57 +10335,20 @@
                           <a:solidFill>
                             <a:schemeClr val="accent1"/>
                           </a:solidFill>
-                          <a:latin typeface="Roboto" charset="0"/>
-                          <a:ea typeface="Roboto" charset="0"/>
-                          <a:cs typeface="Roboto" charset="0"/>
                         </a:rPr>
                         <a:t>F1-score</a:t>
                       </a:r>
+                      <a:endParaRPr lang="en-US" sz="1400" b="1" dirty="0">
+                        <a:solidFill>
+                          <a:schemeClr val="accent1"/>
+                        </a:solidFill>
+                        <a:latin typeface="Roboto" charset="0"/>
+                        <a:ea typeface="Roboto" charset="0"/>
+                        <a:cs typeface="Roboto" charset="0"/>
+                      </a:endParaRPr>
                     </a:p>
                   </a:txBody>
-                  <a:tcPr marL="73152" marR="73152" marT="73152" marB="73152" anchor="ctr">
-                    <a:lnL w="12700" cap="flat" cmpd="sng" algn="ctr">
-                      <a:solidFill>
-                        <a:srgbClr val="A6A6A6"/>
-                      </a:solidFill>
-                      <a:prstDash val="sysDash"/>
-                      <a:round/>
-                      <a:headEnd type="none" w="med" len="med"/>
-                      <a:tailEnd type="none" w="med" len="med"/>
-                    </a:lnL>
-                    <a:lnR w="12700" cap="flat" cmpd="sng" algn="ctr">
-                      <a:solidFill>
-                        <a:srgbClr val="A6A6A6"/>
-                      </a:solidFill>
-                      <a:prstDash val="sysDash"/>
-                      <a:round/>
-                      <a:headEnd type="none" w="med" len="med"/>
-                      <a:tailEnd type="none" w="med" len="med"/>
-                    </a:lnR>
-                    <a:lnT w="0" cap="flat" cmpd="sng" algn="ctr">
-                      <a:solidFill>
-                        <a:srgbClr val="666666"/>
-                      </a:solidFill>
-                      <a:prstDash val="sysDash"/>
-                      <a:round/>
-                      <a:headEnd type="none" w="med" len="med"/>
-                      <a:tailEnd type="none" w="med" len="med"/>
-                    </a:lnT>
-                    <a:lnB w="12700" cap="flat" cmpd="sng" algn="ctr">
-                      <a:solidFill>
-                        <a:srgbClr val="A6A6A6"/>
-                      </a:solidFill>
-                      <a:prstDash val="sysDash"/>
-                      <a:round/>
-                      <a:headEnd type="none" w="med" len="med"/>
-                      <a:tailEnd type="none" w="med" len="med"/>
-                    </a:lnB>
-                    <a:solidFill>
-                      <a:srgbClr val="BFBFBF">
-                        <a:alpha val="0"/>
-                      </a:srgbClr>
-                    </a:solidFill>
-                  </a:tcPr>
+                  <a:tcPr marL="73152" marR="73152" marT="73152" marB="73152" anchor="ctr"/>
                 </a:tc>
                 <a:tc>
                   <a:txBody>
@@ -10132,9 +10363,6 @@
                           <a:solidFill>
                             <a:schemeClr val="accent1"/>
                           </a:solidFill>
-                          <a:latin typeface="Roboto" pitchFamily="34" charset="0"/>
-                          <a:ea typeface="Roboto" pitchFamily="34" charset="-122"/>
-                          <a:cs typeface="Roboto" pitchFamily="34" charset="-120"/>
                         </a:rPr>
                         <a:t>Key Metrics</a:t>
                       </a:r>
@@ -10148,49 +10376,7 @@
                       </a:endParaRPr>
                     </a:p>
                   </a:txBody>
-                  <a:tcPr marL="73152" marR="73152" marT="73152" marB="73152" anchor="ctr">
-                    <a:lnL w="12700" cap="flat" cmpd="sng" algn="ctr">
-                      <a:solidFill>
-                        <a:srgbClr val="A6A6A6"/>
-                      </a:solidFill>
-                      <a:prstDash val="sysDash"/>
-                      <a:round/>
-                      <a:headEnd type="none" w="med" len="med"/>
-                      <a:tailEnd type="none" w="med" len="med"/>
-                    </a:lnL>
-                    <a:lnR w="0" cap="flat" cmpd="sng" algn="ctr">
-                      <a:solidFill>
-                        <a:srgbClr val="666666"/>
-                      </a:solidFill>
-                      <a:prstDash val="sysDash"/>
-                      <a:round/>
-                      <a:headEnd type="none" w="med" len="med"/>
-                      <a:tailEnd type="none" w="med" len="med"/>
-                    </a:lnR>
-                    <a:lnT w="0" cap="flat" cmpd="sng" algn="ctr">
-                      <a:solidFill>
-                        <a:srgbClr val="666666"/>
-                      </a:solidFill>
-                      <a:prstDash val="sysDash"/>
-                      <a:round/>
-                      <a:headEnd type="none" w="med" len="med"/>
-                      <a:tailEnd type="none" w="med" len="med"/>
-                    </a:lnT>
-                    <a:lnB w="12700" cap="flat" cmpd="sng" algn="ctr">
-                      <a:solidFill>
-                        <a:srgbClr val="A6A6A6"/>
-                      </a:solidFill>
-                      <a:prstDash val="sysDash"/>
-                      <a:round/>
-                      <a:headEnd type="none" w="med" len="med"/>
-                      <a:tailEnd type="none" w="med" len="med"/>
-                    </a:lnB>
-                    <a:solidFill>
-                      <a:srgbClr val="BFBFBF">
-                        <a:alpha val="0"/>
-                      </a:srgbClr>
-                    </a:solidFill>
-                  </a:tcPr>
+                  <a:tcPr marL="73152" marR="73152" marT="73152" marB="73152" anchor="ctr"/>
                 </a:tc>
                 <a:extLst>
                   <a:ext uri="{0D108BD9-81ED-4DB2-BD59-A6C34878D82A}">
@@ -10214,9 +10400,6 @@
                               <a:lumMod val="25000"/>
                             </a:schemeClr>
                           </a:solidFill>
-                          <a:latin typeface="Roboto" pitchFamily="34" charset="0"/>
-                          <a:ea typeface="Roboto" pitchFamily="34" charset="-122"/>
-                          <a:cs typeface="Roboto" pitchFamily="34" charset="-120"/>
                         </a:rPr>
                         <a:t>Logistic Regression</a:t>
                       </a:r>
@@ -10232,49 +10415,7 @@
                       </a:endParaRPr>
                     </a:p>
                   </a:txBody>
-                  <a:tcPr marL="73152" marR="73152" marT="73152" marB="73152" anchor="ctr">
-                    <a:lnL w="0" cap="flat" cmpd="sng" algn="ctr">
-                      <a:solidFill>
-                        <a:srgbClr val="666666"/>
-                      </a:solidFill>
-                      <a:prstDash val="sysDash"/>
-                      <a:round/>
-                      <a:headEnd type="none" w="med" len="med"/>
-                      <a:tailEnd type="none" w="med" len="med"/>
-                    </a:lnL>
-                    <a:lnR w="12700" cap="flat" cmpd="sng" algn="ctr">
-                      <a:solidFill>
-                        <a:srgbClr val="A6A6A6"/>
-                      </a:solidFill>
-                      <a:prstDash val="sysDash"/>
-                      <a:round/>
-                      <a:headEnd type="none" w="med" len="med"/>
-                      <a:tailEnd type="none" w="med" len="med"/>
-                    </a:lnR>
-                    <a:lnT w="12700" cap="flat" cmpd="sng" algn="ctr">
-                      <a:solidFill>
-                        <a:srgbClr val="A6A6A6"/>
-                      </a:solidFill>
-                      <a:prstDash val="sysDash"/>
-                      <a:round/>
-                      <a:headEnd type="none" w="med" len="med"/>
-                      <a:tailEnd type="none" w="med" len="med"/>
-                    </a:lnT>
-                    <a:lnB w="12700" cap="flat" cmpd="sng" algn="ctr">
-                      <a:solidFill>
-                        <a:srgbClr val="A6A6A6"/>
-                      </a:solidFill>
-                      <a:prstDash val="sysDash"/>
-                      <a:round/>
-                      <a:headEnd type="none" w="med" len="med"/>
-                      <a:tailEnd type="none" w="med" len="med"/>
-                    </a:lnB>
-                    <a:solidFill>
-                      <a:srgbClr val="BFBFBF">
-                        <a:alpha val="0"/>
-                      </a:srgbClr>
-                    </a:solidFill>
-                  </a:tcPr>
+                  <a:tcPr marL="73152" marR="73152" marT="73152" marB="73152" anchor="ctr"/>
                 </a:tc>
                 <a:tc>
                   <a:txBody>
@@ -10291,9 +10432,6 @@
                               <a:lumMod val="25000"/>
                             </a:schemeClr>
                           </a:solidFill>
-                          <a:latin typeface="Roboto" pitchFamily="34" charset="0"/>
-                          <a:ea typeface="Roboto" pitchFamily="34" charset="-122"/>
-                          <a:cs typeface="Roboto" pitchFamily="34" charset="-120"/>
                         </a:rPr>
                         <a:t>82%</a:t>
                       </a:r>
@@ -10309,49 +10447,7 @@
                       </a:endParaRPr>
                     </a:p>
                   </a:txBody>
-                  <a:tcPr marL="73152" marR="73152" marT="73152" marB="73152" anchor="ctr">
-                    <a:lnL w="12700" cap="flat" cmpd="sng" algn="ctr">
-                      <a:solidFill>
-                        <a:srgbClr val="A6A6A6"/>
-                      </a:solidFill>
-                      <a:prstDash val="sysDash"/>
-                      <a:round/>
-                      <a:headEnd type="none" w="med" len="med"/>
-                      <a:tailEnd type="none" w="med" len="med"/>
-                    </a:lnL>
-                    <a:lnR w="12700" cap="flat" cmpd="sng" algn="ctr">
-                      <a:solidFill>
-                        <a:srgbClr val="A6A6A6"/>
-                      </a:solidFill>
-                      <a:prstDash val="sysDash"/>
-                      <a:round/>
-                      <a:headEnd type="none" w="med" len="med"/>
-                      <a:tailEnd type="none" w="med" len="med"/>
-                    </a:lnR>
-                    <a:lnT w="12700" cap="flat" cmpd="sng" algn="ctr">
-                      <a:solidFill>
-                        <a:srgbClr val="A6A6A6"/>
-                      </a:solidFill>
-                      <a:prstDash val="sysDash"/>
-                      <a:round/>
-                      <a:headEnd type="none" w="med" len="med"/>
-                      <a:tailEnd type="none" w="med" len="med"/>
-                    </a:lnT>
-                    <a:lnB w="12700" cap="flat" cmpd="sng" algn="ctr">
-                      <a:solidFill>
-                        <a:srgbClr val="A6A6A6"/>
-                      </a:solidFill>
-                      <a:prstDash val="sysDash"/>
-                      <a:round/>
-                      <a:headEnd type="none" w="med" len="med"/>
-                      <a:tailEnd type="none" w="med" len="med"/>
-                    </a:lnB>
-                    <a:solidFill>
-                      <a:srgbClr val="BFBFBF">
-                        <a:alpha val="0"/>
-                      </a:srgbClr>
-                    </a:solidFill>
-                  </a:tcPr>
+                  <a:tcPr marL="73152" marR="73152" marT="73152" marB="73152" anchor="ctr"/>
                 </a:tc>
                 <a:tc>
                   <a:txBody>
@@ -10368,57 +10464,22 @@
                               <a:lumMod val="25000"/>
                             </a:schemeClr>
                           </a:solidFill>
-                          <a:latin typeface="Roboto" charset="0"/>
-                          <a:ea typeface="Roboto" charset="0"/>
-                          <a:cs typeface="Roboto" charset="0"/>
                         </a:rPr>
                         <a:t>47%</a:t>
                       </a:r>
+                      <a:endParaRPr lang="en-US" sz="1400" dirty="0">
+                        <a:solidFill>
+                          <a:schemeClr val="bg2">
+                            <a:lumMod val="25000"/>
+                          </a:schemeClr>
+                        </a:solidFill>
+                        <a:latin typeface="Roboto" charset="0"/>
+                        <a:ea typeface="Roboto" charset="0"/>
+                        <a:cs typeface="Roboto" charset="0"/>
+                      </a:endParaRPr>
                     </a:p>
                   </a:txBody>
-                  <a:tcPr marL="73152" marR="73152" marT="73152" marB="73152" anchor="ctr">
-                    <a:lnL w="12700" cap="flat" cmpd="sng" algn="ctr">
-                      <a:solidFill>
-                        <a:srgbClr val="A6A6A6"/>
-                      </a:solidFill>
-                      <a:prstDash val="sysDash"/>
-                      <a:round/>
-                      <a:headEnd type="none" w="med" len="med"/>
-                      <a:tailEnd type="none" w="med" len="med"/>
-                    </a:lnL>
-                    <a:lnR w="12700" cap="flat" cmpd="sng" algn="ctr">
-                      <a:solidFill>
-                        <a:srgbClr val="A6A6A6"/>
-                      </a:solidFill>
-                      <a:prstDash val="sysDash"/>
-                      <a:round/>
-                      <a:headEnd type="none" w="med" len="med"/>
-                      <a:tailEnd type="none" w="med" len="med"/>
-                    </a:lnR>
-                    <a:lnT w="12700" cap="flat" cmpd="sng" algn="ctr">
-                      <a:solidFill>
-                        <a:srgbClr val="A6A6A6"/>
-                      </a:solidFill>
-                      <a:prstDash val="sysDash"/>
-                      <a:round/>
-                      <a:headEnd type="none" w="med" len="med"/>
-                      <a:tailEnd type="none" w="med" len="med"/>
-                    </a:lnT>
-                    <a:lnB w="12700" cap="flat" cmpd="sng" algn="ctr">
-                      <a:solidFill>
-                        <a:srgbClr val="A6A6A6"/>
-                      </a:solidFill>
-                      <a:prstDash val="sysDash"/>
-                      <a:round/>
-                      <a:headEnd type="none" w="med" len="med"/>
-                      <a:tailEnd type="none" w="med" len="med"/>
-                    </a:lnB>
-                    <a:solidFill>
-                      <a:srgbClr val="BFBFBF">
-                        <a:alpha val="0"/>
-                      </a:srgbClr>
-                    </a:solidFill>
-                  </a:tcPr>
+                  <a:tcPr marL="73152" marR="73152" marT="73152" marB="73152" anchor="ctr"/>
                 </a:tc>
                 <a:tc>
                   <a:txBody>
@@ -10435,57 +10496,22 @@
                               <a:lumMod val="25000"/>
                             </a:schemeClr>
                           </a:solidFill>
-                          <a:latin typeface="Roboto" charset="0"/>
-                          <a:ea typeface="Roboto" charset="0"/>
-                          <a:cs typeface="Roboto" charset="0"/>
                         </a:rPr>
                         <a:t>24%</a:t>
                       </a:r>
+                      <a:endParaRPr lang="en-US" sz="1400" dirty="0">
+                        <a:solidFill>
+                          <a:schemeClr val="bg2">
+                            <a:lumMod val="25000"/>
+                          </a:schemeClr>
+                        </a:solidFill>
+                        <a:latin typeface="Roboto" charset="0"/>
+                        <a:ea typeface="Roboto" charset="0"/>
+                        <a:cs typeface="Roboto" charset="0"/>
+                      </a:endParaRPr>
                     </a:p>
                   </a:txBody>
-                  <a:tcPr marL="73152" marR="73152" marT="73152" marB="73152" anchor="ctr">
-                    <a:lnL w="12700" cap="flat" cmpd="sng" algn="ctr">
-                      <a:solidFill>
-                        <a:srgbClr val="A6A6A6"/>
-                      </a:solidFill>
-                      <a:prstDash val="sysDash"/>
-                      <a:round/>
-                      <a:headEnd type="none" w="med" len="med"/>
-                      <a:tailEnd type="none" w="med" len="med"/>
-                    </a:lnL>
-                    <a:lnR w="12700" cap="flat" cmpd="sng" algn="ctr">
-                      <a:solidFill>
-                        <a:srgbClr val="A6A6A6"/>
-                      </a:solidFill>
-                      <a:prstDash val="sysDash"/>
-                      <a:round/>
-                      <a:headEnd type="none" w="med" len="med"/>
-                      <a:tailEnd type="none" w="med" len="med"/>
-                    </a:lnR>
-                    <a:lnT w="12700" cap="flat" cmpd="sng" algn="ctr">
-                      <a:solidFill>
-                        <a:srgbClr val="A6A6A6"/>
-                      </a:solidFill>
-                      <a:prstDash val="sysDash"/>
-                      <a:round/>
-                      <a:headEnd type="none" w="med" len="med"/>
-                      <a:tailEnd type="none" w="med" len="med"/>
-                    </a:lnT>
-                    <a:lnB w="12700" cap="flat" cmpd="sng" algn="ctr">
-                      <a:solidFill>
-                        <a:srgbClr val="A6A6A6"/>
-                      </a:solidFill>
-                      <a:prstDash val="sysDash"/>
-                      <a:round/>
-                      <a:headEnd type="none" w="med" len="med"/>
-                      <a:tailEnd type="none" w="med" len="med"/>
-                    </a:lnB>
-                    <a:solidFill>
-                      <a:srgbClr val="BFBFBF">
-                        <a:alpha val="0"/>
-                      </a:srgbClr>
-                    </a:solidFill>
-                  </a:tcPr>
+                  <a:tcPr marL="73152" marR="73152" marT="73152" marB="73152" anchor="ctr"/>
                 </a:tc>
                 <a:tc>
                   <a:txBody>
@@ -10502,57 +10528,22 @@
                               <a:lumMod val="25000"/>
                             </a:schemeClr>
                           </a:solidFill>
-                          <a:latin typeface="Roboto" charset="0"/>
-                          <a:ea typeface="Roboto" charset="0"/>
-                          <a:cs typeface="Roboto" charset="0"/>
                         </a:rPr>
                         <a:t>32%</a:t>
                       </a:r>
+                      <a:endParaRPr lang="en-US" sz="1400" dirty="0">
+                        <a:solidFill>
+                          <a:schemeClr val="bg2">
+                            <a:lumMod val="25000"/>
+                          </a:schemeClr>
+                        </a:solidFill>
+                        <a:latin typeface="Roboto" charset="0"/>
+                        <a:ea typeface="Roboto" charset="0"/>
+                        <a:cs typeface="Roboto" charset="0"/>
+                      </a:endParaRPr>
                     </a:p>
                   </a:txBody>
-                  <a:tcPr marL="73152" marR="73152" marT="73152" marB="73152" anchor="ctr">
-                    <a:lnL w="12700" cap="flat" cmpd="sng" algn="ctr">
-                      <a:solidFill>
-                        <a:srgbClr val="A6A6A6"/>
-                      </a:solidFill>
-                      <a:prstDash val="sysDash"/>
-                      <a:round/>
-                      <a:headEnd type="none" w="med" len="med"/>
-                      <a:tailEnd type="none" w="med" len="med"/>
-                    </a:lnL>
-                    <a:lnR w="12700" cap="flat" cmpd="sng" algn="ctr">
-                      <a:solidFill>
-                        <a:srgbClr val="A6A6A6"/>
-                      </a:solidFill>
-                      <a:prstDash val="sysDash"/>
-                      <a:round/>
-                      <a:headEnd type="none" w="med" len="med"/>
-                      <a:tailEnd type="none" w="med" len="med"/>
-                    </a:lnR>
-                    <a:lnT w="12700" cap="flat" cmpd="sng" algn="ctr">
-                      <a:solidFill>
-                        <a:srgbClr val="A6A6A6"/>
-                      </a:solidFill>
-                      <a:prstDash val="sysDash"/>
-                      <a:round/>
-                      <a:headEnd type="none" w="med" len="med"/>
-                      <a:tailEnd type="none" w="med" len="med"/>
-                    </a:lnT>
-                    <a:lnB w="12700" cap="flat" cmpd="sng" algn="ctr">
-                      <a:solidFill>
-                        <a:srgbClr val="A6A6A6"/>
-                      </a:solidFill>
-                      <a:prstDash val="sysDash"/>
-                      <a:round/>
-                      <a:headEnd type="none" w="med" len="med"/>
-                      <a:tailEnd type="none" w="med" len="med"/>
-                    </a:lnB>
-                    <a:solidFill>
-                      <a:srgbClr val="BFBFBF">
-                        <a:alpha val="0"/>
-                      </a:srgbClr>
-                    </a:solidFill>
-                  </a:tcPr>
+                  <a:tcPr marL="73152" marR="73152" marT="73152" marB="73152" anchor="ctr"/>
                 </a:tc>
                 <a:tc>
                   <a:txBody>
@@ -10574,49 +10565,7 @@
                       </a:endParaRPr>
                     </a:p>
                   </a:txBody>
-                  <a:tcPr marL="73152" marR="73152" marT="73152" marB="73152" anchor="ctr">
-                    <a:lnL w="12700" cap="flat" cmpd="sng" algn="ctr">
-                      <a:solidFill>
-                        <a:srgbClr val="A6A6A6"/>
-                      </a:solidFill>
-                      <a:prstDash val="sysDash"/>
-                      <a:round/>
-                      <a:headEnd type="none" w="med" len="med"/>
-                      <a:tailEnd type="none" w="med" len="med"/>
-                    </a:lnL>
-                    <a:lnR w="0" cap="flat" cmpd="sng" algn="ctr">
-                      <a:solidFill>
-                        <a:srgbClr val="666666"/>
-                      </a:solidFill>
-                      <a:prstDash val="sysDash"/>
-                      <a:round/>
-                      <a:headEnd type="none" w="med" len="med"/>
-                      <a:tailEnd type="none" w="med" len="med"/>
-                    </a:lnR>
-                    <a:lnT w="12700" cap="flat" cmpd="sng" algn="ctr">
-                      <a:solidFill>
-                        <a:srgbClr val="A6A6A6"/>
-                      </a:solidFill>
-                      <a:prstDash val="sysDash"/>
-                      <a:round/>
-                      <a:headEnd type="none" w="med" len="med"/>
-                      <a:tailEnd type="none" w="med" len="med"/>
-                    </a:lnT>
-                    <a:lnB w="12700" cap="flat" cmpd="sng" algn="ctr">
-                      <a:solidFill>
-                        <a:srgbClr val="A6A6A6"/>
-                      </a:solidFill>
-                      <a:prstDash val="sysDash"/>
-                      <a:round/>
-                      <a:headEnd type="none" w="med" len="med"/>
-                      <a:tailEnd type="none" w="med" len="med"/>
-                    </a:lnB>
-                    <a:solidFill>
-                      <a:srgbClr val="BFBFBF">
-                        <a:alpha val="0"/>
-                      </a:srgbClr>
-                    </a:solidFill>
-                  </a:tcPr>
+                  <a:tcPr marL="73152" marR="73152" marT="73152" marB="73152" anchor="ctr"/>
                 </a:tc>
                 <a:extLst>
                   <a:ext uri="{0D108BD9-81ED-4DB2-BD59-A6C34878D82A}">
@@ -10640,9 +10589,6 @@
                               <a:lumMod val="25000"/>
                             </a:schemeClr>
                           </a:solidFill>
-                          <a:latin typeface="Roboto" pitchFamily="34" charset="0"/>
-                          <a:ea typeface="Roboto" pitchFamily="34" charset="-122"/>
-                          <a:cs typeface="Roboto" pitchFamily="34" charset="-120"/>
                         </a:rPr>
                         <a:t>Decision Tree</a:t>
                       </a:r>
@@ -10658,49 +10604,7 @@
                       </a:endParaRPr>
                     </a:p>
                   </a:txBody>
-                  <a:tcPr marL="73152" marR="73152" marT="73152" marB="73152" anchor="ctr">
-                    <a:lnL w="0" cap="flat" cmpd="sng" algn="ctr">
-                      <a:solidFill>
-                        <a:srgbClr val="666666"/>
-                      </a:solidFill>
-                      <a:prstDash val="sysDash"/>
-                      <a:round/>
-                      <a:headEnd type="none" w="med" len="med"/>
-                      <a:tailEnd type="none" w="med" len="med"/>
-                    </a:lnL>
-                    <a:lnR w="12700" cap="flat" cmpd="sng" algn="ctr">
-                      <a:solidFill>
-                        <a:srgbClr val="A6A6A6"/>
-                      </a:solidFill>
-                      <a:prstDash val="sysDash"/>
-                      <a:round/>
-                      <a:headEnd type="none" w="med" len="med"/>
-                      <a:tailEnd type="none" w="med" len="med"/>
-                    </a:lnR>
-                    <a:lnT w="12700" cap="flat" cmpd="sng" algn="ctr">
-                      <a:solidFill>
-                        <a:srgbClr val="A6A6A6"/>
-                      </a:solidFill>
-                      <a:prstDash val="sysDash"/>
-                      <a:round/>
-                      <a:headEnd type="none" w="med" len="med"/>
-                      <a:tailEnd type="none" w="med" len="med"/>
-                    </a:lnT>
-                    <a:lnB w="12700" cap="flat" cmpd="sng" algn="ctr">
-                      <a:solidFill>
-                        <a:srgbClr val="A6A6A6"/>
-                      </a:solidFill>
-                      <a:prstDash val="sysDash"/>
-                      <a:round/>
-                      <a:headEnd type="none" w="med" len="med"/>
-                      <a:tailEnd type="none" w="med" len="med"/>
-                    </a:lnB>
-                    <a:solidFill>
-                      <a:srgbClr val="BFBFBF">
-                        <a:alpha val="0"/>
-                      </a:srgbClr>
-                    </a:solidFill>
-                  </a:tcPr>
+                  <a:tcPr marL="73152" marR="73152" marT="73152" marB="73152" anchor="ctr"/>
                 </a:tc>
                 <a:tc>
                   <a:txBody>
@@ -10717,9 +10621,6 @@
                               <a:lumMod val="25000"/>
                             </a:schemeClr>
                           </a:solidFill>
-                          <a:latin typeface="Roboto" pitchFamily="34" charset="0"/>
-                          <a:ea typeface="Roboto" pitchFamily="34" charset="-122"/>
-                          <a:cs typeface="Roboto" pitchFamily="34" charset="-120"/>
                         </a:rPr>
                         <a:t>94%</a:t>
                       </a:r>
@@ -10735,49 +10636,7 @@
                       </a:endParaRPr>
                     </a:p>
                   </a:txBody>
-                  <a:tcPr marL="73152" marR="73152" marT="73152" marB="73152" anchor="ctr">
-                    <a:lnL w="12700" cap="flat" cmpd="sng" algn="ctr">
-                      <a:solidFill>
-                        <a:srgbClr val="A6A6A6"/>
-                      </a:solidFill>
-                      <a:prstDash val="sysDash"/>
-                      <a:round/>
-                      <a:headEnd type="none" w="med" len="med"/>
-                      <a:tailEnd type="none" w="med" len="med"/>
-                    </a:lnL>
-                    <a:lnR w="12700" cap="flat" cmpd="sng" algn="ctr">
-                      <a:solidFill>
-                        <a:srgbClr val="A6A6A6"/>
-                      </a:solidFill>
-                      <a:prstDash val="sysDash"/>
-                      <a:round/>
-                      <a:headEnd type="none" w="med" len="med"/>
-                      <a:tailEnd type="none" w="med" len="med"/>
-                    </a:lnR>
-                    <a:lnT w="12700" cap="flat" cmpd="sng" algn="ctr">
-                      <a:solidFill>
-                        <a:srgbClr val="A6A6A6"/>
-                      </a:solidFill>
-                      <a:prstDash val="sysDash"/>
-                      <a:round/>
-                      <a:headEnd type="none" w="med" len="med"/>
-                      <a:tailEnd type="none" w="med" len="med"/>
-                    </a:lnT>
-                    <a:lnB w="12700" cap="flat" cmpd="sng" algn="ctr">
-                      <a:solidFill>
-                        <a:srgbClr val="A6A6A6"/>
-                      </a:solidFill>
-                      <a:prstDash val="sysDash"/>
-                      <a:round/>
-                      <a:headEnd type="none" w="med" len="med"/>
-                      <a:tailEnd type="none" w="med" len="med"/>
-                    </a:lnB>
-                    <a:solidFill>
-                      <a:srgbClr val="BFBFBF">
-                        <a:alpha val="0"/>
-                      </a:srgbClr>
-                    </a:solidFill>
-                  </a:tcPr>
+                  <a:tcPr marL="73152" marR="73152" marT="73152" marB="73152" anchor="ctr"/>
                 </a:tc>
                 <a:tc>
                   <a:txBody>
@@ -10794,57 +10653,22 @@
                               <a:lumMod val="25000"/>
                             </a:schemeClr>
                           </a:solidFill>
-                          <a:latin typeface="Roboto" charset="0"/>
-                          <a:ea typeface="Roboto" charset="0"/>
-                          <a:cs typeface="Roboto" charset="0"/>
                         </a:rPr>
                         <a:t>82%</a:t>
                       </a:r>
+                      <a:endParaRPr lang="en-US" sz="1400" dirty="0">
+                        <a:solidFill>
+                          <a:schemeClr val="bg2">
+                            <a:lumMod val="25000"/>
+                          </a:schemeClr>
+                        </a:solidFill>
+                        <a:latin typeface="Roboto" charset="0"/>
+                        <a:ea typeface="Roboto" charset="0"/>
+                        <a:cs typeface="Roboto" charset="0"/>
+                      </a:endParaRPr>
                     </a:p>
                   </a:txBody>
-                  <a:tcPr marL="73152" marR="73152" marT="73152" marB="73152" anchor="ctr">
-                    <a:lnL w="12700" cap="flat" cmpd="sng" algn="ctr">
-                      <a:solidFill>
-                        <a:srgbClr val="A6A6A6"/>
-                      </a:solidFill>
-                      <a:prstDash val="sysDash"/>
-                      <a:round/>
-                      <a:headEnd type="none" w="med" len="med"/>
-                      <a:tailEnd type="none" w="med" len="med"/>
-                    </a:lnL>
-                    <a:lnR w="12700" cap="flat" cmpd="sng" algn="ctr">
-                      <a:solidFill>
-                        <a:srgbClr val="A6A6A6"/>
-                      </a:solidFill>
-                      <a:prstDash val="sysDash"/>
-                      <a:round/>
-                      <a:headEnd type="none" w="med" len="med"/>
-                      <a:tailEnd type="none" w="med" len="med"/>
-                    </a:lnR>
-                    <a:lnT w="12700" cap="flat" cmpd="sng" algn="ctr">
-                      <a:solidFill>
-                        <a:srgbClr val="A6A6A6"/>
-                      </a:solidFill>
-                      <a:prstDash val="sysDash"/>
-                      <a:round/>
-                      <a:headEnd type="none" w="med" len="med"/>
-                      <a:tailEnd type="none" w="med" len="med"/>
-                    </a:lnT>
-                    <a:lnB w="12700" cap="flat" cmpd="sng" algn="ctr">
-                      <a:solidFill>
-                        <a:srgbClr val="A6A6A6"/>
-                      </a:solidFill>
-                      <a:prstDash val="sysDash"/>
-                      <a:round/>
-                      <a:headEnd type="none" w="med" len="med"/>
-                      <a:tailEnd type="none" w="med" len="med"/>
-                    </a:lnB>
-                    <a:solidFill>
-                      <a:srgbClr val="BFBFBF">
-                        <a:alpha val="0"/>
-                      </a:srgbClr>
-                    </a:solidFill>
-                  </a:tcPr>
+                  <a:tcPr marL="73152" marR="73152" marT="73152" marB="73152" anchor="ctr"/>
                 </a:tc>
                 <a:tc>
                   <a:txBody>
@@ -10861,57 +10685,22 @@
                               <a:lumMod val="25000"/>
                             </a:schemeClr>
                           </a:solidFill>
-                          <a:latin typeface="Roboto" charset="0"/>
-                          <a:ea typeface="Roboto" charset="0"/>
-                          <a:cs typeface="Roboto" charset="0"/>
                         </a:rPr>
                         <a:t>85%</a:t>
                       </a:r>
+                      <a:endParaRPr lang="en-US" sz="1400" dirty="0">
+                        <a:solidFill>
+                          <a:schemeClr val="bg2">
+                            <a:lumMod val="25000"/>
+                          </a:schemeClr>
+                        </a:solidFill>
+                        <a:latin typeface="Roboto" charset="0"/>
+                        <a:ea typeface="Roboto" charset="0"/>
+                        <a:cs typeface="Roboto" charset="0"/>
+                      </a:endParaRPr>
                     </a:p>
                   </a:txBody>
-                  <a:tcPr marL="73152" marR="73152" marT="73152" marB="73152" anchor="ctr">
-                    <a:lnL w="12700" cap="flat" cmpd="sng" algn="ctr">
-                      <a:solidFill>
-                        <a:srgbClr val="A6A6A6"/>
-                      </a:solidFill>
-                      <a:prstDash val="sysDash"/>
-                      <a:round/>
-                      <a:headEnd type="none" w="med" len="med"/>
-                      <a:tailEnd type="none" w="med" len="med"/>
-                    </a:lnL>
-                    <a:lnR w="12700" cap="flat" cmpd="sng" algn="ctr">
-                      <a:solidFill>
-                        <a:srgbClr val="A6A6A6"/>
-                      </a:solidFill>
-                      <a:prstDash val="sysDash"/>
-                      <a:round/>
-                      <a:headEnd type="none" w="med" len="med"/>
-                      <a:tailEnd type="none" w="med" len="med"/>
-                    </a:lnR>
-                    <a:lnT w="12700" cap="flat" cmpd="sng" algn="ctr">
-                      <a:solidFill>
-                        <a:srgbClr val="A6A6A6"/>
-                      </a:solidFill>
-                      <a:prstDash val="sysDash"/>
-                      <a:round/>
-                      <a:headEnd type="none" w="med" len="med"/>
-                      <a:tailEnd type="none" w="med" len="med"/>
-                    </a:lnT>
-                    <a:lnB w="12700" cap="flat" cmpd="sng" algn="ctr">
-                      <a:solidFill>
-                        <a:srgbClr val="A6A6A6"/>
-                      </a:solidFill>
-                      <a:prstDash val="sysDash"/>
-                      <a:round/>
-                      <a:headEnd type="none" w="med" len="med"/>
-                      <a:tailEnd type="none" w="med" len="med"/>
-                    </a:lnB>
-                    <a:solidFill>
-                      <a:srgbClr val="BFBFBF">
-                        <a:alpha val="0"/>
-                      </a:srgbClr>
-                    </a:solidFill>
-                  </a:tcPr>
+                  <a:tcPr marL="73152" marR="73152" marT="73152" marB="73152" anchor="ctr"/>
                 </a:tc>
                 <a:tc>
                   <a:txBody>
@@ -10928,57 +10717,22 @@
                               <a:lumMod val="25000"/>
                             </a:schemeClr>
                           </a:solidFill>
-                          <a:latin typeface="Roboto" charset="0"/>
-                          <a:ea typeface="Roboto" charset="0"/>
-                          <a:cs typeface="Roboto" charset="0"/>
                         </a:rPr>
                         <a:t>84%</a:t>
                       </a:r>
+                      <a:endParaRPr lang="en-US" sz="1400" dirty="0">
+                        <a:solidFill>
+                          <a:schemeClr val="bg2">
+                            <a:lumMod val="25000"/>
+                          </a:schemeClr>
+                        </a:solidFill>
+                        <a:latin typeface="Roboto" charset="0"/>
+                        <a:ea typeface="Roboto" charset="0"/>
+                        <a:cs typeface="Roboto" charset="0"/>
+                      </a:endParaRPr>
                     </a:p>
                   </a:txBody>
-                  <a:tcPr marL="73152" marR="73152" marT="73152" marB="73152" anchor="ctr">
-                    <a:lnL w="12700" cap="flat" cmpd="sng" algn="ctr">
-                      <a:solidFill>
-                        <a:srgbClr val="A6A6A6"/>
-                      </a:solidFill>
-                      <a:prstDash val="sysDash"/>
-                      <a:round/>
-                      <a:headEnd type="none" w="med" len="med"/>
-                      <a:tailEnd type="none" w="med" len="med"/>
-                    </a:lnL>
-                    <a:lnR w="12700" cap="flat" cmpd="sng" algn="ctr">
-                      <a:solidFill>
-                        <a:srgbClr val="A6A6A6"/>
-                      </a:solidFill>
-                      <a:prstDash val="sysDash"/>
-                      <a:round/>
-                      <a:headEnd type="none" w="med" len="med"/>
-                      <a:tailEnd type="none" w="med" len="med"/>
-                    </a:lnR>
-                    <a:lnT w="12700" cap="flat" cmpd="sng" algn="ctr">
-                      <a:solidFill>
-                        <a:srgbClr val="A6A6A6"/>
-                      </a:solidFill>
-                      <a:prstDash val="sysDash"/>
-                      <a:round/>
-                      <a:headEnd type="none" w="med" len="med"/>
-                      <a:tailEnd type="none" w="med" len="med"/>
-                    </a:lnT>
-                    <a:lnB w="12700" cap="flat" cmpd="sng" algn="ctr">
-                      <a:solidFill>
-                        <a:srgbClr val="A6A6A6"/>
-                      </a:solidFill>
-                      <a:prstDash val="sysDash"/>
-                      <a:round/>
-                      <a:headEnd type="none" w="med" len="med"/>
-                      <a:tailEnd type="none" w="med" len="med"/>
-                    </a:lnB>
-                    <a:solidFill>
-                      <a:srgbClr val="BFBFBF">
-                        <a:alpha val="0"/>
-                      </a:srgbClr>
-                    </a:solidFill>
-                  </a:tcPr>
+                  <a:tcPr marL="73152" marR="73152" marT="73152" marB="73152" anchor="ctr"/>
                 </a:tc>
                 <a:tc>
                   <a:txBody>
@@ -10995,9 +10749,6 @@
                               <a:lumMod val="25000"/>
                             </a:schemeClr>
                           </a:solidFill>
-                          <a:latin typeface="Roboto" pitchFamily="34" charset="0"/>
-                          <a:ea typeface="Roboto" pitchFamily="34" charset="-122"/>
-                          <a:cs typeface="Roboto" pitchFamily="34" charset="-120"/>
                         </a:rPr>
                         <a:t>Work hours, evaluation, years employed, salary</a:t>
                       </a:r>
@@ -11013,49 +10764,7 @@
                       </a:endParaRPr>
                     </a:p>
                   </a:txBody>
-                  <a:tcPr marL="73152" marR="73152" marT="73152" marB="73152" anchor="ctr">
-                    <a:lnL w="12700" cap="flat" cmpd="sng" algn="ctr">
-                      <a:solidFill>
-                        <a:srgbClr val="A6A6A6"/>
-                      </a:solidFill>
-                      <a:prstDash val="sysDash"/>
-                      <a:round/>
-                      <a:headEnd type="none" w="med" len="med"/>
-                      <a:tailEnd type="none" w="med" len="med"/>
-                    </a:lnL>
-                    <a:lnR w="0" cap="flat" cmpd="sng" algn="ctr">
-                      <a:solidFill>
-                        <a:srgbClr val="666666"/>
-                      </a:solidFill>
-                      <a:prstDash val="sysDash"/>
-                      <a:round/>
-                      <a:headEnd type="none" w="med" len="med"/>
-                      <a:tailEnd type="none" w="med" len="med"/>
-                    </a:lnR>
-                    <a:lnT w="12700" cap="flat" cmpd="sng" algn="ctr">
-                      <a:solidFill>
-                        <a:srgbClr val="A6A6A6"/>
-                      </a:solidFill>
-                      <a:prstDash val="sysDash"/>
-                      <a:round/>
-                      <a:headEnd type="none" w="med" len="med"/>
-                      <a:tailEnd type="none" w="med" len="med"/>
-                    </a:lnT>
-                    <a:lnB w="12700" cap="flat" cmpd="sng" algn="ctr">
-                      <a:solidFill>
-                        <a:srgbClr val="A6A6A6"/>
-                      </a:solidFill>
-                      <a:prstDash val="sysDash"/>
-                      <a:round/>
-                      <a:headEnd type="none" w="med" len="med"/>
-                      <a:tailEnd type="none" w="med" len="med"/>
-                    </a:lnB>
-                    <a:solidFill>
-                      <a:srgbClr val="BFBFBF">
-                        <a:alpha val="0"/>
-                      </a:srgbClr>
-                    </a:solidFill>
-                  </a:tcPr>
+                  <a:tcPr marL="73152" marR="73152" marT="73152" marB="73152" anchor="ctr"/>
                 </a:tc>
                 <a:extLst>
                   <a:ext uri="{0D108BD9-81ED-4DB2-BD59-A6C34878D82A}">
@@ -11079,57 +10788,22 @@
                               <a:lumMod val="25000"/>
                             </a:schemeClr>
                           </a:solidFill>
-                          <a:latin typeface="Roboto" pitchFamily="34" charset="0"/>
-                          <a:ea typeface="Roboto" pitchFamily="34" charset="-122"/>
-                          <a:cs typeface="Roboto" pitchFamily="34" charset="-120"/>
                         </a:rPr>
                         <a:t>Random Forest</a:t>
                       </a:r>
+                      <a:endParaRPr lang="en-US" sz="1400" dirty="0">
+                        <a:solidFill>
+                          <a:schemeClr val="bg2">
+                            <a:lumMod val="25000"/>
+                          </a:schemeClr>
+                        </a:solidFill>
+                        <a:latin typeface="Roboto" pitchFamily="34" charset="0"/>
+                        <a:ea typeface="Roboto" pitchFamily="34" charset="-122"/>
+                        <a:cs typeface="Roboto" pitchFamily="34" charset="-120"/>
+                      </a:endParaRPr>
                     </a:p>
                   </a:txBody>
-                  <a:tcPr marL="73152" marR="73152" marT="73152" marB="73152" anchor="ctr">
-                    <a:lnL w="0" cap="flat" cmpd="sng" algn="ctr">
-                      <a:solidFill>
-                        <a:srgbClr val="666666"/>
-                      </a:solidFill>
-                      <a:prstDash val="sysDash"/>
-                      <a:round/>
-                      <a:headEnd type="none" w="med" len="med"/>
-                      <a:tailEnd type="none" w="med" len="med"/>
-                    </a:lnL>
-                    <a:lnR w="12700" cap="flat" cmpd="sng" algn="ctr">
-                      <a:solidFill>
-                        <a:srgbClr val="A6A6A6"/>
-                      </a:solidFill>
-                      <a:prstDash val="sysDash"/>
-                      <a:round/>
-                      <a:headEnd type="none" w="med" len="med"/>
-                      <a:tailEnd type="none" w="med" len="med"/>
-                    </a:lnR>
-                    <a:lnT w="12700" cap="flat" cmpd="sng" algn="ctr">
-                      <a:solidFill>
-                        <a:srgbClr val="A6A6A6"/>
-                      </a:solidFill>
-                      <a:prstDash val="sysDash"/>
-                      <a:round/>
-                      <a:headEnd type="none" w="med" len="med"/>
-                      <a:tailEnd type="none" w="med" len="med"/>
-                    </a:lnT>
-                    <a:lnB w="12700" cap="flat" cmpd="sng" algn="ctr">
-                      <a:solidFill>
-                        <a:srgbClr val="A6A6A6"/>
-                      </a:solidFill>
-                      <a:prstDash val="sysDash"/>
-                      <a:round/>
-                      <a:headEnd type="none" w="med" len="med"/>
-                      <a:tailEnd type="none" w="med" len="med"/>
-                    </a:lnB>
-                    <a:solidFill>
-                      <a:srgbClr val="BFBFBF">
-                        <a:alpha val="0"/>
-                      </a:srgbClr>
-                    </a:solidFill>
-                  </a:tcPr>
+                  <a:tcPr marL="73152" marR="73152" marT="73152" marB="73152" anchor="ctr"/>
                 </a:tc>
                 <a:tc>
                   <a:txBody>
@@ -11146,9 +10820,6 @@
                               <a:lumMod val="25000"/>
                             </a:schemeClr>
                           </a:solidFill>
-                          <a:latin typeface="Roboto" pitchFamily="34" charset="0"/>
-                          <a:ea typeface="Roboto" pitchFamily="34" charset="-122"/>
-                          <a:cs typeface="Roboto" pitchFamily="34" charset="-120"/>
                         </a:rPr>
                         <a:t>95%</a:t>
                       </a:r>
@@ -11164,49 +10835,7 @@
                       </a:endParaRPr>
                     </a:p>
                   </a:txBody>
-                  <a:tcPr marL="73152" marR="73152" marT="73152" marB="73152" anchor="ctr">
-                    <a:lnL w="12700" cap="flat" cmpd="sng" algn="ctr">
-                      <a:solidFill>
-                        <a:srgbClr val="A6A6A6"/>
-                      </a:solidFill>
-                      <a:prstDash val="sysDash"/>
-                      <a:round/>
-                      <a:headEnd type="none" w="med" len="med"/>
-                      <a:tailEnd type="none" w="med" len="med"/>
-                    </a:lnL>
-                    <a:lnR w="12700" cap="flat" cmpd="sng" algn="ctr">
-                      <a:solidFill>
-                        <a:srgbClr val="A6A6A6"/>
-                      </a:solidFill>
-                      <a:prstDash val="sysDash"/>
-                      <a:round/>
-                      <a:headEnd type="none" w="med" len="med"/>
-                      <a:tailEnd type="none" w="med" len="med"/>
-                    </a:lnR>
-                    <a:lnT w="12700" cap="flat" cmpd="sng" algn="ctr">
-                      <a:solidFill>
-                        <a:srgbClr val="A6A6A6"/>
-                      </a:solidFill>
-                      <a:prstDash val="sysDash"/>
-                      <a:round/>
-                      <a:headEnd type="none" w="med" len="med"/>
-                      <a:tailEnd type="none" w="med" len="med"/>
-                    </a:lnT>
-                    <a:lnB w="12700" cap="flat" cmpd="sng" algn="ctr">
-                      <a:solidFill>
-                        <a:srgbClr val="A6A6A6"/>
-                      </a:solidFill>
-                      <a:prstDash val="sysDash"/>
-                      <a:round/>
-                      <a:headEnd type="none" w="med" len="med"/>
-                      <a:tailEnd type="none" w="med" len="med"/>
-                    </a:lnB>
-                    <a:solidFill>
-                      <a:srgbClr val="BFBFBF">
-                        <a:alpha val="0"/>
-                      </a:srgbClr>
-                    </a:solidFill>
-                  </a:tcPr>
+                  <a:tcPr marL="73152" marR="73152" marT="73152" marB="73152" anchor="ctr"/>
                 </a:tc>
                 <a:tc>
                   <a:txBody>
@@ -11223,57 +10852,22 @@
                               <a:lumMod val="25000"/>
                             </a:schemeClr>
                           </a:solidFill>
-                          <a:latin typeface="Roboto" charset="0"/>
-                          <a:ea typeface="Roboto" charset="0"/>
-                          <a:cs typeface="Roboto" charset="0"/>
                         </a:rPr>
                         <a:t>80%</a:t>
                       </a:r>
+                      <a:endParaRPr lang="en-US" sz="1400" dirty="0">
+                        <a:solidFill>
+                          <a:schemeClr val="bg2">
+                            <a:lumMod val="25000"/>
+                          </a:schemeClr>
+                        </a:solidFill>
+                        <a:latin typeface="Roboto" charset="0"/>
+                        <a:ea typeface="Roboto" charset="0"/>
+                        <a:cs typeface="Roboto" charset="0"/>
+                      </a:endParaRPr>
                     </a:p>
                   </a:txBody>
-                  <a:tcPr marL="73152" marR="73152" marT="73152" marB="73152" anchor="ctr">
-                    <a:lnL w="12700" cap="flat" cmpd="sng" algn="ctr">
-                      <a:solidFill>
-                        <a:srgbClr val="A6A6A6"/>
-                      </a:solidFill>
-                      <a:prstDash val="sysDash"/>
-                      <a:round/>
-                      <a:headEnd type="none" w="med" len="med"/>
-                      <a:tailEnd type="none" w="med" len="med"/>
-                    </a:lnL>
-                    <a:lnR w="12700" cap="flat" cmpd="sng" algn="ctr">
-                      <a:solidFill>
-                        <a:srgbClr val="A6A6A6"/>
-                      </a:solidFill>
-                      <a:prstDash val="sysDash"/>
-                      <a:round/>
-                      <a:headEnd type="none" w="med" len="med"/>
-                      <a:tailEnd type="none" w="med" len="med"/>
-                    </a:lnR>
-                    <a:lnT w="12700" cap="flat" cmpd="sng" algn="ctr">
-                      <a:solidFill>
-                        <a:srgbClr val="A6A6A6"/>
-                      </a:solidFill>
-                      <a:prstDash val="sysDash"/>
-                      <a:round/>
-                      <a:headEnd type="none" w="med" len="med"/>
-                      <a:tailEnd type="none" w="med" len="med"/>
-                    </a:lnT>
-                    <a:lnB w="12700" cap="flat" cmpd="sng" algn="ctr">
-                      <a:solidFill>
-                        <a:srgbClr val="A6A6A6"/>
-                      </a:solidFill>
-                      <a:prstDash val="sysDash"/>
-                      <a:round/>
-                      <a:headEnd type="none" w="med" len="med"/>
-                      <a:tailEnd type="none" w="med" len="med"/>
-                    </a:lnB>
-                    <a:solidFill>
-                      <a:srgbClr val="BFBFBF">
-                        <a:alpha val="0"/>
-                      </a:srgbClr>
-                    </a:solidFill>
-                  </a:tcPr>
+                  <a:tcPr marL="73152" marR="73152" marT="73152" marB="73152" anchor="ctr"/>
                 </a:tc>
                 <a:tc>
                   <a:txBody>
@@ -11290,57 +10884,22 @@
                               <a:lumMod val="25000"/>
                             </a:schemeClr>
                           </a:solidFill>
-                          <a:latin typeface="Roboto" charset="0"/>
-                          <a:ea typeface="Roboto" charset="0"/>
-                          <a:cs typeface="Roboto" charset="0"/>
                         </a:rPr>
                         <a:t>91%</a:t>
                       </a:r>
+                      <a:endParaRPr lang="en-US" sz="1400" dirty="0">
+                        <a:solidFill>
+                          <a:schemeClr val="bg2">
+                            <a:lumMod val="25000"/>
+                          </a:schemeClr>
+                        </a:solidFill>
+                        <a:latin typeface="Roboto" charset="0"/>
+                        <a:ea typeface="Roboto" charset="0"/>
+                        <a:cs typeface="Roboto" charset="0"/>
+                      </a:endParaRPr>
                     </a:p>
                   </a:txBody>
-                  <a:tcPr marL="73152" marR="73152" marT="73152" marB="73152" anchor="ctr">
-                    <a:lnL w="12700" cap="flat" cmpd="sng" algn="ctr">
-                      <a:solidFill>
-                        <a:srgbClr val="A6A6A6"/>
-                      </a:solidFill>
-                      <a:prstDash val="sysDash"/>
-                      <a:round/>
-                      <a:headEnd type="none" w="med" len="med"/>
-                      <a:tailEnd type="none" w="med" len="med"/>
-                    </a:lnL>
-                    <a:lnR w="12700" cap="flat" cmpd="sng" algn="ctr">
-                      <a:solidFill>
-                        <a:srgbClr val="A6A6A6"/>
-                      </a:solidFill>
-                      <a:prstDash val="sysDash"/>
-                      <a:round/>
-                      <a:headEnd type="none" w="med" len="med"/>
-                      <a:tailEnd type="none" w="med" len="med"/>
-                    </a:lnR>
-                    <a:lnT w="12700" cap="flat" cmpd="sng" algn="ctr">
-                      <a:solidFill>
-                        <a:srgbClr val="A6A6A6"/>
-                      </a:solidFill>
-                      <a:prstDash val="sysDash"/>
-                      <a:round/>
-                      <a:headEnd type="none" w="med" len="med"/>
-                      <a:tailEnd type="none" w="med" len="med"/>
-                    </a:lnT>
-                    <a:lnB w="12700" cap="flat" cmpd="sng" algn="ctr">
-                      <a:solidFill>
-                        <a:srgbClr val="A6A6A6"/>
-                      </a:solidFill>
-                      <a:prstDash val="sysDash"/>
-                      <a:round/>
-                      <a:headEnd type="none" w="med" len="med"/>
-                      <a:tailEnd type="none" w="med" len="med"/>
-                    </a:lnB>
-                    <a:solidFill>
-                      <a:srgbClr val="BFBFBF">
-                        <a:alpha val="0"/>
-                      </a:srgbClr>
-                    </a:solidFill>
-                  </a:tcPr>
+                  <a:tcPr marL="73152" marR="73152" marT="73152" marB="73152" anchor="ctr"/>
                 </a:tc>
                 <a:tc>
                   <a:txBody>
@@ -11357,57 +10916,22 @@
                               <a:lumMod val="25000"/>
                             </a:schemeClr>
                           </a:solidFill>
-                          <a:latin typeface="Roboto" charset="0"/>
-                          <a:ea typeface="Roboto" charset="0"/>
-                          <a:cs typeface="Roboto" charset="0"/>
                         </a:rPr>
                         <a:t>86%</a:t>
                       </a:r>
+                      <a:endParaRPr lang="en-US" sz="1400" dirty="0">
+                        <a:solidFill>
+                          <a:schemeClr val="bg2">
+                            <a:lumMod val="25000"/>
+                          </a:schemeClr>
+                        </a:solidFill>
+                        <a:latin typeface="Roboto" charset="0"/>
+                        <a:ea typeface="Roboto" charset="0"/>
+                        <a:cs typeface="Roboto" charset="0"/>
+                      </a:endParaRPr>
                     </a:p>
                   </a:txBody>
-                  <a:tcPr marL="73152" marR="73152" marT="73152" marB="73152" anchor="ctr">
-                    <a:lnL w="12700" cap="flat" cmpd="sng" algn="ctr">
-                      <a:solidFill>
-                        <a:srgbClr val="A6A6A6"/>
-                      </a:solidFill>
-                      <a:prstDash val="sysDash"/>
-                      <a:round/>
-                      <a:headEnd type="none" w="med" len="med"/>
-                      <a:tailEnd type="none" w="med" len="med"/>
-                    </a:lnL>
-                    <a:lnR w="12700" cap="flat" cmpd="sng" algn="ctr">
-                      <a:solidFill>
-                        <a:srgbClr val="A6A6A6"/>
-                      </a:solidFill>
-                      <a:prstDash val="sysDash"/>
-                      <a:round/>
-                      <a:headEnd type="none" w="med" len="med"/>
-                      <a:tailEnd type="none" w="med" len="med"/>
-                    </a:lnR>
-                    <a:lnT w="12700" cap="flat" cmpd="sng" algn="ctr">
-                      <a:solidFill>
-                        <a:srgbClr val="A6A6A6"/>
-                      </a:solidFill>
-                      <a:prstDash val="sysDash"/>
-                      <a:round/>
-                      <a:headEnd type="none" w="med" len="med"/>
-                      <a:tailEnd type="none" w="med" len="med"/>
-                    </a:lnT>
-                    <a:lnB w="12700" cap="flat" cmpd="sng" algn="ctr">
-                      <a:solidFill>
-                        <a:srgbClr val="A6A6A6"/>
-                      </a:solidFill>
-                      <a:prstDash val="sysDash"/>
-                      <a:round/>
-                      <a:headEnd type="none" w="med" len="med"/>
-                      <a:tailEnd type="none" w="med" len="med"/>
-                    </a:lnB>
-                    <a:solidFill>
-                      <a:srgbClr val="BFBFBF">
-                        <a:alpha val="0"/>
-                      </a:srgbClr>
-                    </a:solidFill>
-                  </a:tcPr>
+                  <a:tcPr marL="73152" marR="73152" marT="73152" marB="73152" anchor="ctr"/>
                 </a:tc>
                 <a:tc>
                   <a:txBody>
@@ -11438,9 +10962,6 @@
                               <a:lumMod val="25000"/>
                             </a:schemeClr>
                           </a:solidFill>
-                          <a:latin typeface="Roboto" pitchFamily="34" charset="0"/>
-                          <a:ea typeface="Roboto" pitchFamily="34" charset="-122"/>
-                          <a:cs typeface="Roboto" pitchFamily="34" charset="-120"/>
                         </a:rPr>
                         <a:t>Work hours, evaluation, years employed, salary</a:t>
                       </a:r>
@@ -11456,49 +10977,7 @@
                       </a:endParaRPr>
                     </a:p>
                   </a:txBody>
-                  <a:tcPr marL="73152" marR="73152" marT="73152" marB="73152" anchor="ctr">
-                    <a:lnL w="12700" cap="flat" cmpd="sng" algn="ctr">
-                      <a:solidFill>
-                        <a:srgbClr val="A6A6A6"/>
-                      </a:solidFill>
-                      <a:prstDash val="sysDash"/>
-                      <a:round/>
-                      <a:headEnd type="none" w="med" len="med"/>
-                      <a:tailEnd type="none" w="med" len="med"/>
-                    </a:lnL>
-                    <a:lnR w="0" cap="flat" cmpd="sng" algn="ctr">
-                      <a:solidFill>
-                        <a:srgbClr val="666666"/>
-                      </a:solidFill>
-                      <a:prstDash val="sysDash"/>
-                      <a:round/>
-                      <a:headEnd type="none" w="med" len="med"/>
-                      <a:tailEnd type="none" w="med" len="med"/>
-                    </a:lnR>
-                    <a:lnT w="12700" cap="flat" cmpd="sng" algn="ctr">
-                      <a:solidFill>
-                        <a:srgbClr val="A6A6A6"/>
-                      </a:solidFill>
-                      <a:prstDash val="sysDash"/>
-                      <a:round/>
-                      <a:headEnd type="none" w="med" len="med"/>
-                      <a:tailEnd type="none" w="med" len="med"/>
-                    </a:lnT>
-                    <a:lnB w="12700" cap="flat" cmpd="sng" algn="ctr">
-                      <a:solidFill>
-                        <a:srgbClr val="A6A6A6"/>
-                      </a:solidFill>
-                      <a:prstDash val="sysDash"/>
-                      <a:round/>
-                      <a:headEnd type="none" w="med" len="med"/>
-                      <a:tailEnd type="none" w="med" len="med"/>
-                    </a:lnB>
-                    <a:solidFill>
-                      <a:srgbClr val="BFBFBF">
-                        <a:alpha val="0"/>
-                      </a:srgbClr>
-                    </a:solidFill>
-                  </a:tcPr>
+                  <a:tcPr marL="73152" marR="73152" marT="73152" marB="73152" anchor="ctr"/>
                 </a:tc>
                 <a:extLst>
                   <a:ext uri="{0D108BD9-81ED-4DB2-BD59-A6C34878D82A}">
@@ -11786,6 +11265,41 @@
           </a:p>
         </p:txBody>
       </p:sp>
+      <p:sp>
+        <p:nvSpPr>
+          <p:cNvPr id="6" name="TextBox 5">
+            <a:extLst>
+              <a:ext uri="{FF2B5EF4-FFF2-40B4-BE49-F238E27FC236}">
+                <a16:creationId xmlns:a16="http://schemas.microsoft.com/office/drawing/2014/main" id="{E9B1FCED-D1CB-82C9-2FBD-9DAA8C4722A1}"/>
+              </a:ext>
+            </a:extLst>
+          </p:cNvPr>
+          <p:cNvSpPr txBox="1"/>
+          <p:nvPr/>
+        </p:nvSpPr>
+        <p:spPr>
+          <a:xfrm>
+            <a:off x="471591" y="4913868"/>
+            <a:ext cx="10501211" cy="923330"/>
+          </a:xfrm>
+          <a:prstGeom prst="rect">
+            <a:avLst/>
+          </a:prstGeom>
+          <a:noFill/>
+        </p:spPr>
+        <p:txBody>
+          <a:bodyPr wrap="square" rtlCol="0">
+            <a:spAutoFit/>
+          </a:bodyPr>
+          <a:lstStyle/>
+          <a:p>
+            <a:r>
+              <a:rPr lang="en-US" dirty="0"/>
+              <a:t>Tree based models provide much better prediction evaluation metrics then logistic regression. And they also can reveal what variables strongly affect the decision of leaving the company, namely work hours, evaluation, tenure, and salary</a:t>
+            </a:r>
+          </a:p>
+        </p:txBody>
+      </p:sp>
     </p:spTree>
     <p:extLst>
       <p:ext uri="{BB962C8B-B14F-4D97-AF65-F5344CB8AC3E}">
@@ -11799,7 +11313,7 @@
 </p:sld>
 </file>
 
-<file path=ppt/slides/slide5.xml><?xml version="1.0" encoding="utf-8"?>
+<file path=ppt/slides/slide7.xml><?xml version="1.0" encoding="utf-8"?>
 <p:sld xmlns:a="http://schemas.openxmlformats.org/drawingml/2006/main" xmlns:r="http://schemas.openxmlformats.org/officeDocument/2006/relationships" xmlns:p="http://schemas.openxmlformats.org/presentationml/2006/main">
   <p:cSld>
     <p:spTree>
@@ -11838,7 +11352,7 @@
         </p:blipFill>
         <p:spPr>
           <a:xfrm>
-            <a:off x="178017" y="1971842"/>
+            <a:off x="458674" y="2306820"/>
             <a:ext cx="4047678" cy="3324425"/>
           </a:xfrm>
           <a:prstGeom prst="rect">
@@ -11868,7 +11382,7 @@
         </p:blipFill>
         <p:spPr>
           <a:xfrm>
-            <a:off x="4294173" y="1502342"/>
+            <a:off x="4303227" y="1885563"/>
             <a:ext cx="7536630" cy="4166938"/>
           </a:xfrm>
           <a:prstGeom prst="rect">
@@ -12002,7 +11516,7 @@
                 <a:latin typeface="Calibri"/>
                 <a:cs typeface="Calibri"/>
               </a:rPr>
-              <a:t>Retention Prediction Model Visualization</a:t>
+              <a:t>Random Forest Metrics Visualization</a:t>
             </a:r>
           </a:p>
         </p:txBody>
@@ -12021,7 +11535,7 @@
         </p:nvSpPr>
         <p:spPr>
           <a:xfrm>
-            <a:off x="902445" y="1420796"/>
+            <a:off x="1183102" y="1755774"/>
             <a:ext cx="2598822" cy="519764"/>
           </a:xfrm>
           <a:prstGeom prst="rect">
@@ -12152,7 +11666,7 @@
 </p:sld>
 </file>
 
-<file path=ppt/slides/slide6.xml><?xml version="1.0" encoding="utf-8"?>
+<file path=ppt/slides/slide8.xml><?xml version="1.0" encoding="utf-8"?>
 <p:sld xmlns:a="http://schemas.openxmlformats.org/drawingml/2006/main" xmlns:r="http://schemas.openxmlformats.org/officeDocument/2006/relationships" xmlns:p="http://schemas.openxmlformats.org/presentationml/2006/main">
   <p:cSld>
     <p:spTree>
@@ -12775,348 +12289,6 @@
     <p:extLst>
       <p:ext uri="{BB962C8B-B14F-4D97-AF65-F5344CB8AC3E}">
         <p14:creationId xmlns:p14="http://schemas.microsoft.com/office/powerpoint/2010/main" val="230045405"/>
-      </p:ext>
-    </p:extLst>
-  </p:cSld>
-  <p:clrMapOvr>
-    <a:masterClrMapping/>
-  </p:clrMapOvr>
-</p:sld>
-</file>
-
-<file path=ppt/slides/slide7.xml><?xml version="1.0" encoding="utf-8"?>
-<p:sld xmlns:a="http://schemas.openxmlformats.org/drawingml/2006/main" xmlns:r="http://schemas.openxmlformats.org/officeDocument/2006/relationships" xmlns:p="http://schemas.openxmlformats.org/presentationml/2006/main">
-  <p:cSld>
-    <p:spTree>
-      <p:nvGrpSpPr>
-        <p:cNvPr id="1" name=""/>
-        <p:cNvGrpSpPr/>
-        <p:nvPr/>
-      </p:nvGrpSpPr>
-      <p:grpSpPr>
-        <a:xfrm>
-          <a:off x="0" y="0"/>
-          <a:ext cx="0" cy="0"/>
-          <a:chOff x="0" y="0"/>
-          <a:chExt cx="0" cy="0"/>
-        </a:xfrm>
-      </p:grpSpPr>
-      <p:pic>
-        <p:nvPicPr>
-          <p:cNvPr id="1026" name="Picture 2">
-            <a:extLst>
-              <a:ext uri="{FF2B5EF4-FFF2-40B4-BE49-F238E27FC236}">
-                <a16:creationId xmlns:a16="http://schemas.microsoft.com/office/drawing/2014/main" id="{679B33F7-35B8-8467-4571-FB3F136B26E5}"/>
-              </a:ext>
-            </a:extLst>
-          </p:cNvPr>
-          <p:cNvPicPr>
-            <a:picLocks noChangeAspect="1" noChangeArrowheads="1"/>
-          </p:cNvPicPr>
-          <p:nvPr/>
-        </p:nvPicPr>
-        <p:blipFill>
-          <a:blip r:embed="rId2">
-            <a:extLst>
-              <a:ext uri="{28A0092B-C50C-407E-A947-70E740481C1C}">
-                <a14:useLocalDpi xmlns:a14="http://schemas.microsoft.com/office/drawing/2010/main" val="0"/>
-              </a:ext>
-            </a:extLst>
-          </a:blip>
-          <a:srcRect/>
-          <a:stretch>
-            <a:fillRect/>
-          </a:stretch>
-        </p:blipFill>
-        <p:spPr bwMode="auto">
-          <a:xfrm>
-            <a:off x="3985374" y="41083"/>
-            <a:ext cx="4076359" cy="2935823"/>
-          </a:xfrm>
-          <a:prstGeom prst="rect">
-            <a:avLst/>
-          </a:prstGeom>
-          <a:noFill/>
-          <a:extLst>
-            <a:ext uri="{909E8E84-426E-40DD-AFC4-6F175D3DCCD1}">
-              <a14:hiddenFill xmlns:a14="http://schemas.microsoft.com/office/drawing/2010/main">
-                <a:solidFill>
-                  <a:srgbClr val="FFFFFF"/>
-                </a:solidFill>
-              </a14:hiddenFill>
-            </a:ext>
-          </a:extLst>
-        </p:spPr>
-      </p:pic>
-      <p:pic>
-        <p:nvPicPr>
-          <p:cNvPr id="1032" name="Picture 8">
-            <a:extLst>
-              <a:ext uri="{FF2B5EF4-FFF2-40B4-BE49-F238E27FC236}">
-                <a16:creationId xmlns:a16="http://schemas.microsoft.com/office/drawing/2014/main" id="{90297757-6E6A-90D3-D0EC-020835312357}"/>
-              </a:ext>
-            </a:extLst>
-          </p:cNvPr>
-          <p:cNvPicPr>
-            <a:picLocks noChangeAspect="1" noChangeArrowheads="1"/>
-          </p:cNvPicPr>
-          <p:nvPr/>
-        </p:nvPicPr>
-        <p:blipFill>
-          <a:blip r:embed="rId3">
-            <a:extLst>
-              <a:ext uri="{28A0092B-C50C-407E-A947-70E740481C1C}">
-                <a14:useLocalDpi xmlns:a14="http://schemas.microsoft.com/office/drawing/2010/main" val="0"/>
-              </a:ext>
-            </a:extLst>
-          </a:blip>
-          <a:srcRect/>
-          <a:stretch>
-            <a:fillRect/>
-          </a:stretch>
-        </p:blipFill>
-        <p:spPr bwMode="auto">
-          <a:xfrm>
-            <a:off x="0" y="31585"/>
-            <a:ext cx="4076359" cy="2913182"/>
-          </a:xfrm>
-          <a:prstGeom prst="rect">
-            <a:avLst/>
-          </a:prstGeom>
-          <a:noFill/>
-          <a:extLst>
-            <a:ext uri="{909E8E84-426E-40DD-AFC4-6F175D3DCCD1}">
-              <a14:hiddenFill xmlns:a14="http://schemas.microsoft.com/office/drawing/2010/main">
-                <a:solidFill>
-                  <a:srgbClr val="FFFFFF"/>
-                </a:solidFill>
-              </a14:hiddenFill>
-            </a:ext>
-          </a:extLst>
-        </p:spPr>
-      </p:pic>
-      <p:pic>
-        <p:nvPicPr>
-          <p:cNvPr id="1034" name="Picture 10">
-            <a:extLst>
-              <a:ext uri="{FF2B5EF4-FFF2-40B4-BE49-F238E27FC236}">
-                <a16:creationId xmlns:a16="http://schemas.microsoft.com/office/drawing/2014/main" id="{189D1FF3-B8BD-7A40-5D10-D5CF1CCA87E5}"/>
-              </a:ext>
-            </a:extLst>
-          </p:cNvPr>
-          <p:cNvPicPr>
-            <a:picLocks noChangeAspect="1" noChangeArrowheads="1"/>
-          </p:cNvPicPr>
-          <p:nvPr/>
-        </p:nvPicPr>
-        <p:blipFill>
-          <a:blip r:embed="rId4">
-            <a:extLst>
-              <a:ext uri="{28A0092B-C50C-407E-A947-70E740481C1C}">
-                <a14:useLocalDpi xmlns:a14="http://schemas.microsoft.com/office/drawing/2010/main" val="0"/>
-              </a:ext>
-            </a:extLst>
-          </a:blip>
-          <a:srcRect/>
-          <a:stretch>
-            <a:fillRect/>
-          </a:stretch>
-        </p:blipFill>
-        <p:spPr bwMode="auto">
-          <a:xfrm>
-            <a:off x="25157" y="3097549"/>
-            <a:ext cx="6454301" cy="3760452"/>
-          </a:xfrm>
-          <a:prstGeom prst="rect">
-            <a:avLst/>
-          </a:prstGeom>
-          <a:noFill/>
-          <a:extLst>
-            <a:ext uri="{909E8E84-426E-40DD-AFC4-6F175D3DCCD1}">
-              <a14:hiddenFill xmlns:a14="http://schemas.microsoft.com/office/drawing/2010/main">
-                <a:solidFill>
-                  <a:srgbClr val="FFFFFF"/>
-                </a:solidFill>
-              </a14:hiddenFill>
-            </a:ext>
-          </a:extLst>
-        </p:spPr>
-      </p:pic>
-      <p:pic>
-        <p:nvPicPr>
-          <p:cNvPr id="1036" name="Picture 12">
-            <a:extLst>
-              <a:ext uri="{FF2B5EF4-FFF2-40B4-BE49-F238E27FC236}">
-                <a16:creationId xmlns:a16="http://schemas.microsoft.com/office/drawing/2014/main" id="{2E7BD1BB-50B0-4E8B-3003-18A59FFFF4A7}"/>
-              </a:ext>
-            </a:extLst>
-          </p:cNvPr>
-          <p:cNvPicPr>
-            <a:picLocks noChangeAspect="1" noChangeArrowheads="1"/>
-          </p:cNvPicPr>
-          <p:nvPr/>
-        </p:nvPicPr>
-        <p:blipFill>
-          <a:blip r:embed="rId5">
-            <a:extLst>
-              <a:ext uri="{28A0092B-C50C-407E-A947-70E740481C1C}">
-                <a14:useLocalDpi xmlns:a14="http://schemas.microsoft.com/office/drawing/2010/main" val="0"/>
-              </a:ext>
-            </a:extLst>
-          </a:blip>
-          <a:srcRect/>
-          <a:stretch>
-            <a:fillRect/>
-          </a:stretch>
-        </p:blipFill>
-        <p:spPr bwMode="auto">
-          <a:xfrm>
-            <a:off x="7970747" y="31584"/>
-            <a:ext cx="4076359" cy="2868931"/>
-          </a:xfrm>
-          <a:prstGeom prst="rect">
-            <a:avLst/>
-          </a:prstGeom>
-          <a:noFill/>
-          <a:extLst>
-            <a:ext uri="{909E8E84-426E-40DD-AFC4-6F175D3DCCD1}">
-              <a14:hiddenFill xmlns:a14="http://schemas.microsoft.com/office/drawing/2010/main">
-                <a:solidFill>
-                  <a:srgbClr val="FFFFFF"/>
-                </a:solidFill>
-              </a14:hiddenFill>
-            </a:ext>
-          </a:extLst>
-        </p:spPr>
-      </p:pic>
-      <p:pic>
-        <p:nvPicPr>
-          <p:cNvPr id="1038" name="Picture 14">
-            <a:extLst>
-              <a:ext uri="{FF2B5EF4-FFF2-40B4-BE49-F238E27FC236}">
-                <a16:creationId xmlns:a16="http://schemas.microsoft.com/office/drawing/2014/main" id="{27639667-43F5-5853-3D6E-6B2F852269B8}"/>
-              </a:ext>
-            </a:extLst>
-          </p:cNvPr>
-          <p:cNvPicPr>
-            <a:picLocks noChangeAspect="1" noChangeArrowheads="1"/>
-          </p:cNvPicPr>
-          <p:nvPr/>
-        </p:nvPicPr>
-        <p:blipFill>
-          <a:blip r:embed="rId6">
-            <a:extLst>
-              <a:ext uri="{28A0092B-C50C-407E-A947-70E740481C1C}">
-                <a14:useLocalDpi xmlns:a14="http://schemas.microsoft.com/office/drawing/2010/main" val="0"/>
-              </a:ext>
-            </a:extLst>
-          </a:blip>
-          <a:srcRect/>
-          <a:stretch>
-            <a:fillRect/>
-          </a:stretch>
-        </p:blipFill>
-        <p:spPr bwMode="auto">
-          <a:xfrm>
-            <a:off x="6475824" y="3872151"/>
-            <a:ext cx="5691019" cy="3021158"/>
-          </a:xfrm>
-          <a:prstGeom prst="rect">
-            <a:avLst/>
-          </a:prstGeom>
-          <a:noFill/>
-          <a:extLst>
-            <a:ext uri="{909E8E84-426E-40DD-AFC4-6F175D3DCCD1}">
-              <a14:hiddenFill xmlns:a14="http://schemas.microsoft.com/office/drawing/2010/main">
-                <a:solidFill>
-                  <a:srgbClr val="FFFFFF"/>
-                </a:solidFill>
-              </a14:hiddenFill>
-            </a:ext>
-          </a:extLst>
-        </p:spPr>
-      </p:pic>
-    </p:spTree>
-    <p:extLst>
-      <p:ext uri="{BB962C8B-B14F-4D97-AF65-F5344CB8AC3E}">
-        <p14:creationId xmlns:p14="http://schemas.microsoft.com/office/powerpoint/2010/main" val="2235376772"/>
-      </p:ext>
-    </p:extLst>
-  </p:cSld>
-  <p:clrMapOvr>
-    <a:masterClrMapping/>
-  </p:clrMapOvr>
-</p:sld>
-</file>
-
-<file path=ppt/slides/slide8.xml><?xml version="1.0" encoding="utf-8"?>
-<p:sld xmlns:a="http://schemas.openxmlformats.org/drawingml/2006/main" xmlns:r="http://schemas.openxmlformats.org/officeDocument/2006/relationships" xmlns:p="http://schemas.openxmlformats.org/presentationml/2006/main">
-  <p:cSld>
-    <p:spTree>
-      <p:nvGrpSpPr>
-        <p:cNvPr id="1" name=""/>
-        <p:cNvGrpSpPr/>
-        <p:nvPr/>
-      </p:nvGrpSpPr>
-      <p:grpSpPr>
-        <a:xfrm>
-          <a:off x="0" y="0"/>
-          <a:ext cx="0" cy="0"/>
-          <a:chOff x="0" y="0"/>
-          <a:chExt cx="0" cy="0"/>
-        </a:xfrm>
-      </p:grpSpPr>
-      <p:pic>
-        <p:nvPicPr>
-          <p:cNvPr id="2050" name="Picture 2">
-            <a:extLst>
-              <a:ext uri="{FF2B5EF4-FFF2-40B4-BE49-F238E27FC236}">
-                <a16:creationId xmlns:a16="http://schemas.microsoft.com/office/drawing/2014/main" id="{11FAC6C0-2F2B-C7B7-DBFA-E776F1EBFCBA}"/>
-              </a:ext>
-            </a:extLst>
-          </p:cNvPr>
-          <p:cNvPicPr>
-            <a:picLocks noChangeAspect="1" noChangeArrowheads="1"/>
-          </p:cNvPicPr>
-          <p:nvPr/>
-        </p:nvPicPr>
-        <p:blipFill>
-          <a:blip r:embed="rId2">
-            <a:extLst>
-              <a:ext uri="{28A0092B-C50C-407E-A947-70E740481C1C}">
-                <a14:useLocalDpi xmlns:a14="http://schemas.microsoft.com/office/drawing/2010/main" val="0"/>
-              </a:ext>
-            </a:extLst>
-          </a:blip>
-          <a:srcRect/>
-          <a:stretch>
-            <a:fillRect/>
-          </a:stretch>
-        </p:blipFill>
-        <p:spPr bwMode="auto">
-          <a:xfrm>
-            <a:off x="1585913" y="809625"/>
-            <a:ext cx="9020175" cy="5238750"/>
-          </a:xfrm>
-          <a:prstGeom prst="rect">
-            <a:avLst/>
-          </a:prstGeom>
-          <a:noFill/>
-          <a:extLst>
-            <a:ext uri="{909E8E84-426E-40DD-AFC4-6F175D3DCCD1}">
-              <a14:hiddenFill xmlns:a14="http://schemas.microsoft.com/office/drawing/2010/main">
-                <a:solidFill>
-                  <a:srgbClr val="FFFFFF"/>
-                </a:solidFill>
-              </a14:hiddenFill>
-            </a:ext>
-          </a:extLst>
-        </p:spPr>
-      </p:pic>
-    </p:spTree>
-    <p:extLst>
-      <p:ext uri="{BB962C8B-B14F-4D97-AF65-F5344CB8AC3E}">
-        <p14:creationId xmlns:p14="http://schemas.microsoft.com/office/powerpoint/2010/main" val="1344380268"/>
       </p:ext>
     </p:extLst>
   </p:cSld>
